--- a/presentacion/UHI-Sevilla-presentacion.pptx
+++ b/presentacion/UHI-Sevilla-presentacion.pptx
@@ -16,39 +16,41 @@
     <p:sldId id="261" r:id="rId11"/>
     <p:sldId id="262" r:id="rId12"/>
     <p:sldId id="263" r:id="rId13"/>
+    <p:sldId id="264" r:id="rId14"/>
+    <p:sldId id="265" r:id="rId15"/>
   </p:sldIdLst>
   <p:sldSz cy="6858000" cx="12192000"/>
   <p:notesSz cx="6858000" cy="9144000"/>
   <p:embeddedFontLst>
     <p:embeddedFont>
       <p:font typeface="Inter SemiBold"/>
-      <p:regular r:id="rId14"/>
-      <p:bold r:id="rId15"/>
-      <p:italic r:id="rId16"/>
-      <p:boldItalic r:id="rId17"/>
+      <p:regular r:id="rId16"/>
+      <p:bold r:id="rId17"/>
+      <p:italic r:id="rId18"/>
+      <p:boldItalic r:id="rId19"/>
     </p:embeddedFont>
     <p:embeddedFont>
       <p:font typeface="Outfit ExtraBold"/>
-      <p:bold r:id="rId18"/>
+      <p:bold r:id="rId20"/>
     </p:embeddedFont>
     <p:embeddedFont>
       <p:font typeface="Inter"/>
-      <p:regular r:id="rId19"/>
-      <p:bold r:id="rId20"/>
-      <p:italic r:id="rId21"/>
-      <p:boldItalic r:id="rId22"/>
+      <p:regular r:id="rId21"/>
+      <p:bold r:id="rId22"/>
+      <p:italic r:id="rId23"/>
+      <p:boldItalic r:id="rId24"/>
     </p:embeddedFont>
     <p:embeddedFont>
       <p:font typeface="Outfit SemiBold"/>
-      <p:regular r:id="rId23"/>
-      <p:bold r:id="rId24"/>
+      <p:regular r:id="rId25"/>
+      <p:bold r:id="rId26"/>
     </p:embeddedFont>
     <p:embeddedFont>
       <p:font typeface="Inter Medium"/>
-      <p:regular r:id="rId25"/>
-      <p:bold r:id="rId26"/>
-      <p:italic r:id="rId27"/>
-      <p:boldItalic r:id="rId28"/>
+      <p:regular r:id="rId27"/>
+      <p:bold r:id="rId28"/>
+      <p:italic r:id="rId29"/>
+      <p:boldItalic r:id="rId30"/>
     </p:embeddedFont>
   </p:embeddedFontLst>
   <p:defaultTextStyle>
@@ -824,6 +826,105 @@
 </p:notes>
 </file>
 
+<file path=ppt/notesSlides/notesSlide10.xml><?xml version="1.0" encoding="utf-8"?>
+<p:notes xmlns:a="http://schemas.openxmlformats.org/drawingml/2006/main" xmlns:r="http://schemas.openxmlformats.org/officeDocument/2006/relationships" xmlns:mc="http://schemas.openxmlformats.org/markup-compatibility/2006" xmlns:mv="urn:schemas-microsoft-com:mac:vml" xmlns:p="http://schemas.openxmlformats.org/presentationml/2006/main" xmlns:c="http://schemas.openxmlformats.org/drawingml/2006/chart" xmlns:dgm="http://schemas.openxmlformats.org/drawingml/2006/diagram" xmlns:o="urn:schemas-microsoft-com:office:office" xmlns:v="urn:schemas-microsoft-com:vml" xmlns:pvml="urn:schemas-microsoft-com:office:powerpoint" xmlns:com="http://schemas.openxmlformats.org/drawingml/2006/compatibility" xmlns:p14="http://schemas.microsoft.com/office/powerpoint/2010/main" xmlns:p15="http://schemas.microsoft.com/office/powerpoint/2012/main" xmlns:ahyp="http://schemas.microsoft.com/office/drawing/2018/hyperlinkcolor" showMasterPhAnim="0" showMasterSp="0">
+  <p:cSld>
+    <p:spTree>
+      <p:nvGrpSpPr>
+        <p:cNvPr id="209" name="Shape 209"/>
+        <p:cNvGrpSpPr/>
+        <p:nvPr/>
+      </p:nvGrpSpPr>
+      <p:grpSpPr>
+        <a:xfrm>
+          <a:off x="0" y="0"/>
+          <a:ext cx="0" cy="0"/>
+          <a:chOff x="0" y="0"/>
+          <a:chExt cx="0" cy="0"/>
+        </a:xfrm>
+      </p:grpSpPr>
+      <p:sp>
+        <p:nvSpPr>
+          <p:cNvPr id="210" name="Google Shape;210;p8:notes"/>
+          <p:cNvSpPr txBox="1"/>
+          <p:nvPr>
+            <p:ph idx="1" type="body"/>
+          </p:nvPr>
+        </p:nvSpPr>
+        <p:spPr>
+          <a:xfrm>
+            <a:off x="685800" y="4343400"/>
+            <a:ext cx="5486400" cy="4114800"/>
+          </a:xfrm>
+          <a:prstGeom prst="rect">
+            <a:avLst/>
+          </a:prstGeom>
+        </p:spPr>
+        <p:txBody>
+          <a:bodyPr anchorCtr="0" anchor="t" bIns="91425" lIns="91425" spcFirstLastPara="1" rIns="91425" wrap="square" tIns="91425">
+            <a:noAutofit/>
+          </a:bodyPr>
+          <a:lstStyle/>
+          <a:p>
+            <a:pPr indent="0" lvl="0" marL="0" rtl="0" algn="l">
+              <a:spcBef>
+                <a:spcPts val="0"/>
+              </a:spcBef>
+              <a:spcAft>
+                <a:spcPts val="0"/>
+              </a:spcAft>
+              <a:buNone/>
+            </a:pPr>
+            <a:r>
+              <a:t/>
+            </a:r>
+            <a:endParaRPr/>
+          </a:p>
+        </p:txBody>
+      </p:sp>
+      <p:sp>
+        <p:nvSpPr>
+          <p:cNvPr id="211" name="Google Shape;211;p8:notes"/>
+          <p:cNvSpPr/>
+          <p:nvPr>
+            <p:ph idx="2" type="sldImg"/>
+          </p:nvPr>
+        </p:nvSpPr>
+        <p:spPr>
+          <a:xfrm>
+            <a:off x="1143225" y="685800"/>
+            <a:ext cx="4572225" cy="3429000"/>
+          </a:xfrm>
+          <a:custGeom>
+            <a:rect b="b" l="l" r="r" t="t"/>
+            <a:pathLst>
+              <a:path extrusionOk="0" h="120000" w="120000">
+                <a:moveTo>
+                  <a:pt x="0" y="0"/>
+                </a:moveTo>
+                <a:lnTo>
+                  <a:pt x="120000" y="0"/>
+                </a:lnTo>
+                <a:lnTo>
+                  <a:pt x="120000" y="120000"/>
+                </a:lnTo>
+                <a:lnTo>
+                  <a:pt x="0" y="120000"/>
+                </a:lnTo>
+                <a:close/>
+              </a:path>
+            </a:pathLst>
+          </a:custGeom>
+        </p:spPr>
+      </p:sp>
+    </p:spTree>
+  </p:cSld>
+  <p:clrMapOvr>
+    <a:masterClrMapping/>
+  </p:clrMapOvr>
+</p:notes>
+</file>
+
 <file path=ppt/notesSlides/notesSlide2.xml><?xml version="1.0" encoding="utf-8"?>
 <p:notes xmlns:a="http://schemas.openxmlformats.org/drawingml/2006/main" xmlns:r="http://schemas.openxmlformats.org/officeDocument/2006/relationships" xmlns:mc="http://schemas.openxmlformats.org/markup-compatibility/2006" xmlns:mv="urn:schemas-microsoft-com:mac:vml" xmlns:p="http://schemas.openxmlformats.org/presentationml/2006/main" xmlns:c="http://schemas.openxmlformats.org/drawingml/2006/chart" xmlns:dgm="http://schemas.openxmlformats.org/drawingml/2006/diagram" xmlns:o="urn:schemas-microsoft-com:office:office" xmlns:v="urn:schemas-microsoft-com:vml" xmlns:pvml="urn:schemas-microsoft-com:office:powerpoint" xmlns:com="http://schemas.openxmlformats.org/drawingml/2006/compatibility" xmlns:p14="http://schemas.microsoft.com/office/powerpoint/2010/main" xmlns:p15="http://schemas.microsoft.com/office/powerpoint/2012/main" xmlns:ahyp="http://schemas.microsoft.com/office/drawing/2018/hyperlinkcolor" showMasterPhAnim="0" showMasterSp="0">
   <p:cSld>
@@ -942,46 +1043,7 @@
       </p:grpSpPr>
       <p:sp>
         <p:nvSpPr>
-          <p:cNvPr id="106" name="Google Shape;106;p3:notes"/>
-          <p:cNvSpPr txBox="1"/>
-          <p:nvPr>
-            <p:ph idx="1" type="body"/>
-          </p:nvPr>
-        </p:nvSpPr>
-        <p:spPr>
-          <a:xfrm>
-            <a:off x="685800" y="4343400"/>
-            <a:ext cx="5486400" cy="4114800"/>
-          </a:xfrm>
-          <a:prstGeom prst="rect">
-            <a:avLst/>
-          </a:prstGeom>
-        </p:spPr>
-        <p:txBody>
-          <a:bodyPr anchorCtr="0" anchor="t" bIns="91425" lIns="91425" spcFirstLastPara="1" rIns="91425" wrap="square" tIns="91425">
-            <a:noAutofit/>
-          </a:bodyPr>
-          <a:lstStyle/>
-          <a:p>
-            <a:pPr indent="0" lvl="0" marL="0" rtl="0" algn="l">
-              <a:spcBef>
-                <a:spcPts val="0"/>
-              </a:spcBef>
-              <a:spcAft>
-                <a:spcPts val="0"/>
-              </a:spcAft>
-              <a:buNone/>
-            </a:pPr>
-            <a:r>
-              <a:t/>
-            </a:r>
-            <a:endParaRPr/>
-          </a:p>
-        </p:txBody>
-      </p:sp>
-      <p:sp>
-        <p:nvSpPr>
-          <p:cNvPr id="107" name="Google Shape;107;p3:notes"/>
+          <p:cNvPr id="106" name="Google Shape;106;g3ec125581c0_0_3:notes"/>
           <p:cNvSpPr/>
           <p:nvPr>
             <p:ph idx="2" type="sldImg"/>
@@ -990,7 +1052,7 @@
         <p:spPr>
           <a:xfrm>
             <a:off x="1143225" y="685800"/>
-            <a:ext cx="4572225" cy="3429000"/>
+            <a:ext cx="4572300" cy="3429000"/>
           </a:xfrm>
           <a:custGeom>
             <a:rect b="b" l="l" r="r" t="t"/>
@@ -1014,6 +1076,45 @@
           </a:custGeom>
         </p:spPr>
       </p:sp>
+      <p:sp>
+        <p:nvSpPr>
+          <p:cNvPr id="107" name="Google Shape;107;g3ec125581c0_0_3:notes"/>
+          <p:cNvSpPr txBox="1"/>
+          <p:nvPr>
+            <p:ph idx="1" type="body"/>
+          </p:nvPr>
+        </p:nvSpPr>
+        <p:spPr>
+          <a:xfrm>
+            <a:off x="685800" y="4343400"/>
+            <a:ext cx="5486400" cy="4114800"/>
+          </a:xfrm>
+          <a:prstGeom prst="rect">
+            <a:avLst/>
+          </a:prstGeom>
+        </p:spPr>
+        <p:txBody>
+          <a:bodyPr anchorCtr="0" anchor="t" bIns="91425" lIns="91425" spcFirstLastPara="1" rIns="91425" wrap="square" tIns="91425">
+            <a:noAutofit/>
+          </a:bodyPr>
+          <a:lstStyle/>
+          <a:p>
+            <a:pPr indent="0" lvl="0" marL="0" rtl="0" algn="l">
+              <a:spcBef>
+                <a:spcPts val="0"/>
+              </a:spcBef>
+              <a:spcAft>
+                <a:spcPts val="0"/>
+              </a:spcAft>
+              <a:buNone/>
+            </a:pPr>
+            <a:r>
+              <a:t/>
+            </a:r>
+            <a:endParaRPr/>
+          </a:p>
+        </p:txBody>
+      </p:sp>
     </p:spTree>
   </p:cSld>
   <p:clrMapOvr>
@@ -1027,7 +1128,7 @@
   <p:cSld>
     <p:spTree>
       <p:nvGrpSpPr>
-        <p:cNvPr id="130" name="Shape 130"/>
+        <p:cNvPr id="110" name="Shape 110"/>
         <p:cNvGrpSpPr/>
         <p:nvPr/>
       </p:nvGrpSpPr>
@@ -1041,7 +1142,7 @@
       </p:grpSpPr>
       <p:sp>
         <p:nvSpPr>
-          <p:cNvPr id="131" name="Google Shape;131;p4:notes"/>
+          <p:cNvPr id="111" name="Google Shape;111;p3:notes"/>
           <p:cNvSpPr txBox="1"/>
           <p:nvPr>
             <p:ph idx="1" type="body"/>
@@ -1080,7 +1181,7 @@
       </p:sp>
       <p:sp>
         <p:nvSpPr>
-          <p:cNvPr id="132" name="Google Shape;132;p4:notes"/>
+          <p:cNvPr id="112" name="Google Shape;112;p3:notes"/>
           <p:cNvSpPr/>
           <p:nvPr>
             <p:ph idx="2" type="sldImg"/>
@@ -1126,7 +1227,7 @@
   <p:cSld>
     <p:spTree>
       <p:nvGrpSpPr>
-        <p:cNvPr id="136" name="Shape 136"/>
+        <p:cNvPr id="135" name="Shape 135"/>
         <p:cNvGrpSpPr/>
         <p:nvPr/>
       </p:nvGrpSpPr>
@@ -1140,7 +1241,7 @@
       </p:grpSpPr>
       <p:sp>
         <p:nvSpPr>
-          <p:cNvPr id="137" name="Google Shape;137;p5:notes"/>
+          <p:cNvPr id="136" name="Google Shape;136;p5:notes"/>
           <p:cNvSpPr txBox="1"/>
           <p:nvPr>
             <p:ph idx="1" type="body"/>
@@ -1179,7 +1280,7 @@
       </p:sp>
       <p:sp>
         <p:nvSpPr>
-          <p:cNvPr id="138" name="Google Shape;138;p5:notes"/>
+          <p:cNvPr id="137" name="Google Shape;137;p5:notes"/>
           <p:cNvSpPr/>
           <p:nvPr>
             <p:ph idx="2" type="sldImg"/>
@@ -1225,7 +1326,7 @@
   <p:cSld>
     <p:spTree>
       <p:nvGrpSpPr>
-        <p:cNvPr id="150" name="Shape 150"/>
+        <p:cNvPr id="149" name="Shape 149"/>
         <p:cNvGrpSpPr/>
         <p:nvPr/>
       </p:nvGrpSpPr>
@@ -1239,7 +1340,7 @@
       </p:grpSpPr>
       <p:sp>
         <p:nvSpPr>
-          <p:cNvPr id="151" name="Google Shape;151;p6:notes"/>
+          <p:cNvPr id="150" name="Google Shape;150;p4:notes"/>
           <p:cNvSpPr txBox="1"/>
           <p:nvPr>
             <p:ph idx="1" type="body"/>
@@ -1278,7 +1379,7 @@
       </p:sp>
       <p:sp>
         <p:nvSpPr>
-          <p:cNvPr id="152" name="Google Shape;152;p6:notes"/>
+          <p:cNvPr id="151" name="Google Shape;151;p4:notes"/>
           <p:cNvSpPr/>
           <p:nvPr>
             <p:ph idx="2" type="sldImg"/>
@@ -1324,7 +1425,7 @@
   <p:cSld>
     <p:spTree>
       <p:nvGrpSpPr>
-        <p:cNvPr id="180" name="Shape 180"/>
+        <p:cNvPr id="155" name="Shape 155"/>
         <p:cNvGrpSpPr/>
         <p:nvPr/>
       </p:nvGrpSpPr>
@@ -1338,7 +1439,7 @@
       </p:grpSpPr>
       <p:sp>
         <p:nvSpPr>
-          <p:cNvPr id="181" name="Google Shape;181;p7:notes"/>
+          <p:cNvPr id="156" name="Google Shape;156;p6:notes"/>
           <p:cNvSpPr txBox="1"/>
           <p:nvPr>
             <p:ph idx="1" type="body"/>
@@ -1377,7 +1478,7 @@
       </p:sp>
       <p:sp>
         <p:nvSpPr>
-          <p:cNvPr id="182" name="Google Shape;182;p7:notes"/>
+          <p:cNvPr id="157" name="Google Shape;157;p6:notes"/>
           <p:cNvSpPr/>
           <p:nvPr>
             <p:ph idx="2" type="sldImg"/>
@@ -1423,7 +1524,7 @@
   <p:cSld>
     <p:spTree>
       <p:nvGrpSpPr>
-        <p:cNvPr id="199" name="Shape 199"/>
+        <p:cNvPr id="185" name="Shape 185"/>
         <p:cNvGrpSpPr/>
         <p:nvPr/>
       </p:nvGrpSpPr>
@@ -1437,7 +1538,106 @@
       </p:grpSpPr>
       <p:sp>
         <p:nvSpPr>
-          <p:cNvPr id="200" name="Google Shape;200;p8:notes"/>
+          <p:cNvPr id="186" name="Google Shape;186;g3ec125581c0_0_7:notes"/>
+          <p:cNvSpPr/>
+          <p:nvPr>
+            <p:ph idx="2" type="sldImg"/>
+          </p:nvPr>
+        </p:nvSpPr>
+        <p:spPr>
+          <a:xfrm>
+            <a:off x="1143225" y="685800"/>
+            <a:ext cx="4572300" cy="3429000"/>
+          </a:xfrm>
+          <a:custGeom>
+            <a:rect b="b" l="l" r="r" t="t"/>
+            <a:pathLst>
+              <a:path extrusionOk="0" h="120000" w="120000">
+                <a:moveTo>
+                  <a:pt x="0" y="0"/>
+                </a:moveTo>
+                <a:lnTo>
+                  <a:pt x="120000" y="0"/>
+                </a:lnTo>
+                <a:lnTo>
+                  <a:pt x="120000" y="120000"/>
+                </a:lnTo>
+                <a:lnTo>
+                  <a:pt x="0" y="120000"/>
+                </a:lnTo>
+                <a:close/>
+              </a:path>
+            </a:pathLst>
+          </a:custGeom>
+        </p:spPr>
+      </p:sp>
+      <p:sp>
+        <p:nvSpPr>
+          <p:cNvPr id="187" name="Google Shape;187;g3ec125581c0_0_7:notes"/>
+          <p:cNvSpPr txBox="1"/>
+          <p:nvPr>
+            <p:ph idx="1" type="body"/>
+          </p:nvPr>
+        </p:nvSpPr>
+        <p:spPr>
+          <a:xfrm>
+            <a:off x="685800" y="4343400"/>
+            <a:ext cx="5486400" cy="4114800"/>
+          </a:xfrm>
+          <a:prstGeom prst="rect">
+            <a:avLst/>
+          </a:prstGeom>
+        </p:spPr>
+        <p:txBody>
+          <a:bodyPr anchorCtr="0" anchor="t" bIns="91425" lIns="91425" spcFirstLastPara="1" rIns="91425" wrap="square" tIns="91425">
+            <a:noAutofit/>
+          </a:bodyPr>
+          <a:lstStyle/>
+          <a:p>
+            <a:pPr indent="0" lvl="0" marL="0" rtl="0" algn="l">
+              <a:spcBef>
+                <a:spcPts val="0"/>
+              </a:spcBef>
+              <a:spcAft>
+                <a:spcPts val="0"/>
+              </a:spcAft>
+              <a:buNone/>
+            </a:pPr>
+            <a:r>
+              <a:t/>
+            </a:r>
+            <a:endParaRPr/>
+          </a:p>
+        </p:txBody>
+      </p:sp>
+    </p:spTree>
+  </p:cSld>
+  <p:clrMapOvr>
+    <a:masterClrMapping/>
+  </p:clrMapOvr>
+</p:notes>
+</file>
+
+<file path=ppt/notesSlides/notesSlide9.xml><?xml version="1.0" encoding="utf-8"?>
+<p:notes xmlns:a="http://schemas.openxmlformats.org/drawingml/2006/main" xmlns:r="http://schemas.openxmlformats.org/officeDocument/2006/relationships" xmlns:mc="http://schemas.openxmlformats.org/markup-compatibility/2006" xmlns:mv="urn:schemas-microsoft-com:mac:vml" xmlns:p="http://schemas.openxmlformats.org/presentationml/2006/main" xmlns:c="http://schemas.openxmlformats.org/drawingml/2006/chart" xmlns:dgm="http://schemas.openxmlformats.org/drawingml/2006/diagram" xmlns:o="urn:schemas-microsoft-com:office:office" xmlns:v="urn:schemas-microsoft-com:vml" xmlns:pvml="urn:schemas-microsoft-com:office:powerpoint" xmlns:com="http://schemas.openxmlformats.org/drawingml/2006/compatibility" xmlns:p14="http://schemas.microsoft.com/office/powerpoint/2010/main" xmlns:p15="http://schemas.microsoft.com/office/powerpoint/2012/main" xmlns:ahyp="http://schemas.microsoft.com/office/drawing/2018/hyperlinkcolor" showMasterPhAnim="0" showMasterSp="0">
+  <p:cSld>
+    <p:spTree>
+      <p:nvGrpSpPr>
+        <p:cNvPr id="190" name="Shape 190"/>
+        <p:cNvGrpSpPr/>
+        <p:nvPr/>
+      </p:nvGrpSpPr>
+      <p:grpSpPr>
+        <a:xfrm>
+          <a:off x="0" y="0"/>
+          <a:ext cx="0" cy="0"/>
+          <a:chOff x="0" y="0"/>
+          <a:chExt cx="0" cy="0"/>
+        </a:xfrm>
+      </p:grpSpPr>
+      <p:sp>
+        <p:nvSpPr>
+          <p:cNvPr id="191" name="Google Shape;191;p7:notes"/>
           <p:cNvSpPr txBox="1"/>
           <p:nvPr>
             <p:ph idx="1" type="body"/>
@@ -1476,7 +1676,7 @@
       </p:sp>
       <p:sp>
         <p:nvSpPr>
-          <p:cNvPr id="201" name="Google Shape;201;p8:notes"/>
+          <p:cNvPr id="192" name="Google Shape;192;p7:notes"/>
           <p:cNvSpPr/>
           <p:nvPr>
             <p:ph idx="2" type="sldImg"/>
@@ -11381,6 +11581,227 @@
 </p:sld>
 </file>
 
+<file path=ppt/slides/slide10.xml><?xml version="1.0" encoding="utf-8"?>
+<p:sld xmlns:a="http://schemas.openxmlformats.org/drawingml/2006/main" xmlns:r="http://schemas.openxmlformats.org/officeDocument/2006/relationships" xmlns:mc="http://schemas.openxmlformats.org/markup-compatibility/2006" xmlns:mv="urn:schemas-microsoft-com:mac:vml" xmlns:p="http://schemas.openxmlformats.org/presentationml/2006/main" xmlns:c="http://schemas.openxmlformats.org/drawingml/2006/chart" xmlns:dgm="http://schemas.openxmlformats.org/drawingml/2006/diagram" xmlns:o="urn:schemas-microsoft-com:office:office" xmlns:v="urn:schemas-microsoft-com:vml" xmlns:pvml="urn:schemas-microsoft-com:office:powerpoint" xmlns:com="http://schemas.openxmlformats.org/drawingml/2006/compatibility" xmlns:p14="http://schemas.microsoft.com/office/powerpoint/2010/main" xmlns:p15="http://schemas.microsoft.com/office/powerpoint/2012/main" xmlns:ahyp="http://schemas.microsoft.com/office/drawing/2018/hyperlinkcolor">
+  <p:cSld>
+    <p:bg>
+      <p:bgPr>
+        <a:solidFill>
+          <a:srgbClr val="F8FAFC"/>
+        </a:solidFill>
+      </p:bgPr>
+    </p:bg>
+    <p:spTree>
+      <p:nvGrpSpPr>
+        <p:cNvPr id="212" name="Shape 212"/>
+        <p:cNvGrpSpPr/>
+        <p:nvPr/>
+      </p:nvGrpSpPr>
+      <p:grpSpPr>
+        <a:xfrm>
+          <a:off x="0" y="0"/>
+          <a:ext cx="0" cy="0"/>
+          <a:chOff x="0" y="0"/>
+          <a:chExt cx="0" cy="0"/>
+        </a:xfrm>
+      </p:grpSpPr>
+      <p:pic>
+        <p:nvPicPr>
+          <p:cNvPr descr="image.png" id="213" name="Google Shape;213;p22"/>
+          <p:cNvPicPr preferRelativeResize="0"/>
+          <p:nvPr/>
+        </p:nvPicPr>
+        <p:blipFill rotWithShape="1">
+          <a:blip r:embed="rId3">
+            <a:alphaModFix/>
+          </a:blip>
+          <a:srcRect b="0" l="0" r="0" t="0"/>
+          <a:stretch/>
+        </p:blipFill>
+        <p:spPr>
+          <a:xfrm>
+            <a:off x="0" y="0"/>
+            <a:ext cx="12192000" cy="6858000"/>
+          </a:xfrm>
+          <a:prstGeom prst="rect">
+            <a:avLst/>
+          </a:prstGeom>
+          <a:noFill/>
+          <a:ln>
+            <a:noFill/>
+          </a:ln>
+        </p:spPr>
+      </p:pic>
+      <p:pic>
+        <p:nvPicPr>
+          <p:cNvPr descr="image.png" id="214" name="Google Shape;214;p22">
+            <a:hlinkClick r:id="rId4"/>
+          </p:cNvPr>
+          <p:cNvPicPr preferRelativeResize="0"/>
+          <p:nvPr/>
+        </p:nvPicPr>
+        <p:blipFill rotWithShape="1">
+          <a:blip r:embed="rId5">
+            <a:alphaModFix/>
+          </a:blip>
+          <a:srcRect b="0" l="0" r="0" t="0"/>
+          <a:stretch/>
+        </p:blipFill>
+        <p:spPr>
+          <a:xfrm>
+            <a:off x="4191000" y="4347120"/>
+            <a:ext cx="3810000" cy="447675"/>
+          </a:xfrm>
+          <a:prstGeom prst="rect">
+            <a:avLst/>
+          </a:prstGeom>
+          <a:noFill/>
+          <a:ln>
+            <a:noFill/>
+          </a:ln>
+        </p:spPr>
+      </p:pic>
+      <p:sp>
+        <p:nvSpPr>
+          <p:cNvPr id="215" name="Google Shape;215;p22"/>
+          <p:cNvSpPr txBox="1"/>
+          <p:nvPr/>
+        </p:nvSpPr>
+        <p:spPr>
+          <a:xfrm>
+            <a:off x="4062412" y="2063055"/>
+            <a:ext cx="4067175" cy="1238250"/>
+          </a:xfrm>
+          <a:prstGeom prst="rect">
+            <a:avLst/>
+          </a:prstGeom>
+          <a:noFill/>
+          <a:ln>
+            <a:noFill/>
+          </a:ln>
+        </p:spPr>
+        <p:txBody>
+          <a:bodyPr anchorCtr="0" anchor="t" bIns="0" lIns="666750" spcFirstLastPara="1" rIns="0" wrap="square" tIns="0">
+            <a:spAutoFit/>
+          </a:bodyPr>
+          <a:lstStyle/>
+          <a:p>
+            <a:pPr indent="0" lvl="0" marL="0" marR="0" rtl="0" algn="ctr">
+              <a:lnSpc>
+                <a:spcPct val="110000"/>
+              </a:lnSpc>
+              <a:spcBef>
+                <a:spcPts val="0"/>
+              </a:spcBef>
+              <a:spcAft>
+                <a:spcPts val="0"/>
+              </a:spcAft>
+              <a:buNone/>
+            </a:pPr>
+            <a:r>
+              <a:rPr b="0" i="0" lang="en-US" sz="8250" u="none" cap="none" strike="noStrike">
+                <a:solidFill>
+                  <a:srgbClr val="EA580C"/>
+                </a:solidFill>
+                <a:latin typeface="Outfit ExtraBold"/>
+                <a:ea typeface="Outfit ExtraBold"/>
+                <a:cs typeface="Outfit ExtraBold"/>
+                <a:sym typeface="Outfit ExtraBold"/>
+              </a:rPr>
+              <a:t>DEMO</a:t>
+            </a:r>
+            <a:endParaRPr/>
+          </a:p>
+        </p:txBody>
+      </p:sp>
+      <p:sp>
+        <p:nvSpPr>
+          <p:cNvPr id="216" name="Google Shape;216;p22"/>
+          <p:cNvSpPr txBox="1"/>
+          <p:nvPr/>
+        </p:nvSpPr>
+        <p:spPr>
+          <a:xfrm>
+            <a:off x="2200275" y="3491805"/>
+            <a:ext cx="7791450" cy="426690"/>
+          </a:xfrm>
+          <a:prstGeom prst="rect">
+            <a:avLst/>
+          </a:prstGeom>
+          <a:noFill/>
+          <a:ln>
+            <a:noFill/>
+          </a:ln>
+        </p:spPr>
+        <p:txBody>
+          <a:bodyPr anchorCtr="0" anchor="t" bIns="0" lIns="0" spcFirstLastPara="1" rIns="0" wrap="square" tIns="0">
+            <a:spAutoFit/>
+          </a:bodyPr>
+          <a:lstStyle/>
+          <a:p>
+            <a:pPr indent="0" lvl="0" marL="0" marR="0" rtl="0" algn="ctr">
+              <a:lnSpc>
+                <a:spcPct val="159952"/>
+              </a:lnSpc>
+              <a:spcBef>
+                <a:spcPts val="0"/>
+              </a:spcBef>
+              <a:spcAft>
+                <a:spcPts val="0"/>
+              </a:spcAft>
+              <a:buNone/>
+            </a:pPr>
+            <a:r>
+              <a:rPr b="0" i="0" lang="en-US" sz="2100" u="none" cap="none" strike="noStrike">
+                <a:solidFill>
+                  <a:srgbClr val="64748B"/>
+                </a:solidFill>
+                <a:latin typeface="Inter"/>
+                <a:ea typeface="Inter"/>
+                <a:cs typeface="Inter"/>
+                <a:sym typeface="Inter"/>
+              </a:rPr>
+              <a:t>Prueba el simulador interactivo de intervenciones sostenibles</a:t>
+            </a:r>
+            <a:endParaRPr/>
+          </a:p>
+        </p:txBody>
+      </p:sp>
+      <p:pic>
+        <p:nvPicPr>
+          <p:cNvPr descr="image.png" id="217" name="Google Shape;217;p22"/>
+          <p:cNvPicPr preferRelativeResize="0"/>
+          <p:nvPr/>
+        </p:nvPicPr>
+        <p:blipFill rotWithShape="1">
+          <a:blip r:embed="rId6">
+            <a:alphaModFix/>
+          </a:blip>
+          <a:srcRect b="0" l="0" r="0" t="0"/>
+          <a:stretch/>
+        </p:blipFill>
+        <p:spPr>
+          <a:xfrm>
+            <a:off x="8214137" y="2405530"/>
+            <a:ext cx="666750" cy="666750"/>
+          </a:xfrm>
+          <a:prstGeom prst="rect">
+            <a:avLst/>
+          </a:prstGeom>
+          <a:noFill/>
+          <a:ln>
+            <a:noFill/>
+          </a:ln>
+        </p:spPr>
+      </p:pic>
+    </p:spTree>
+  </p:cSld>
+  <p:clrMapOvr>
+    <a:masterClrMapping/>
+  </p:clrMapOvr>
+</p:sld>
+</file>
+
 <file path=ppt/slides/slide2.xml><?xml version="1.0" encoding="utf-8"?>
 <p:sld xmlns:a="http://schemas.openxmlformats.org/drawingml/2006/main" xmlns:r="http://schemas.openxmlformats.org/officeDocument/2006/relationships" xmlns:mc="http://schemas.openxmlformats.org/markup-compatibility/2006" xmlns:mv="urn:schemas-microsoft-com:mac:vml" xmlns:p="http://schemas.openxmlformats.org/presentationml/2006/main" xmlns:c="http://schemas.openxmlformats.org/drawingml/2006/chart" xmlns:dgm="http://schemas.openxmlformats.org/drawingml/2006/diagram" xmlns:o="urn:schemas-microsoft-com:office:office" xmlns:v="urn:schemas-microsoft-com:vml" xmlns:pvml="urn:schemas-microsoft-com:office:powerpoint" xmlns:com="http://schemas.openxmlformats.org/drawingml/2006/compatibility" xmlns:p14="http://schemas.microsoft.com/office/powerpoint/2010/main" xmlns:p15="http://schemas.microsoft.com/office/powerpoint/2012/main" xmlns:ahyp="http://schemas.microsoft.com/office/drawing/2018/hyperlinkcolor">
   <p:cSld>
@@ -12031,13 +12452,6 @@
 <file path=ppt/slides/slide3.xml><?xml version="1.0" encoding="utf-8"?>
 <p:sld xmlns:a="http://schemas.openxmlformats.org/drawingml/2006/main" xmlns:r="http://schemas.openxmlformats.org/officeDocument/2006/relationships" xmlns:mc="http://schemas.openxmlformats.org/markup-compatibility/2006" xmlns:mv="urn:schemas-microsoft-com:mac:vml" xmlns:p="http://schemas.openxmlformats.org/presentationml/2006/main" xmlns:c="http://schemas.openxmlformats.org/drawingml/2006/chart" xmlns:dgm="http://schemas.openxmlformats.org/drawingml/2006/diagram" xmlns:o="urn:schemas-microsoft-com:office:office" xmlns:v="urn:schemas-microsoft-com:vml" xmlns:pvml="urn:schemas-microsoft-com:office:powerpoint" xmlns:com="http://schemas.openxmlformats.org/drawingml/2006/compatibility" xmlns:p14="http://schemas.microsoft.com/office/powerpoint/2010/main" xmlns:p15="http://schemas.microsoft.com/office/powerpoint/2012/main" xmlns:ahyp="http://schemas.microsoft.com/office/drawing/2018/hyperlinkcolor">
   <p:cSld>
-    <p:bg>
-      <p:bgPr>
-        <a:solidFill>
-          <a:srgbClr val="F8FAFC"/>
-        </a:solidFill>
-      </p:bgPr>
-    </p:bg>
     <p:spTree>
       <p:nvGrpSpPr>
         <p:cNvPr id="108" name="Shape 108"/>
@@ -12054,7 +12468,67 @@
       </p:grpSpPr>
       <p:pic>
         <p:nvPicPr>
-          <p:cNvPr descr="image.png" id="109" name="Google Shape;109;p15"/>
+          <p:cNvPr descr="Quiero añadadir un diagrama que defina el flujo siguiente&#10;Descarga de datos -&gt; Subida a S3 de AWS -&gt; Transformacion de los datos -&gt; Tratamiento de los datos -&gt; Entrenamiento del modelo" id="109" name="Google Shape;109;p15"/>
+          <p:cNvPicPr preferRelativeResize="0"/>
+          <p:nvPr/>
+        </p:nvPicPr>
+        <p:blipFill>
+          <a:blip r:embed="rId3">
+            <a:alphaModFix/>
+          </a:blip>
+          <a:stretch>
+            <a:fillRect/>
+          </a:stretch>
+        </p:blipFill>
+        <p:spPr>
+          <a:xfrm>
+            <a:off x="-47625" y="0"/>
+            <a:ext cx="12287250" cy="6858000"/>
+          </a:xfrm>
+          <a:prstGeom prst="rect">
+            <a:avLst/>
+          </a:prstGeom>
+          <a:noFill/>
+          <a:ln>
+            <a:noFill/>
+          </a:ln>
+        </p:spPr>
+      </p:pic>
+    </p:spTree>
+  </p:cSld>
+  <p:clrMapOvr>
+    <a:masterClrMapping/>
+  </p:clrMapOvr>
+</p:sld>
+</file>
+
+<file path=ppt/slides/slide4.xml><?xml version="1.0" encoding="utf-8"?>
+<p:sld xmlns:a="http://schemas.openxmlformats.org/drawingml/2006/main" xmlns:r="http://schemas.openxmlformats.org/officeDocument/2006/relationships" xmlns:mc="http://schemas.openxmlformats.org/markup-compatibility/2006" xmlns:mv="urn:schemas-microsoft-com:mac:vml" xmlns:p="http://schemas.openxmlformats.org/presentationml/2006/main" xmlns:c="http://schemas.openxmlformats.org/drawingml/2006/chart" xmlns:dgm="http://schemas.openxmlformats.org/drawingml/2006/diagram" xmlns:o="urn:schemas-microsoft-com:office:office" xmlns:v="urn:schemas-microsoft-com:vml" xmlns:pvml="urn:schemas-microsoft-com:office:powerpoint" xmlns:com="http://schemas.openxmlformats.org/drawingml/2006/compatibility" xmlns:p14="http://schemas.microsoft.com/office/powerpoint/2010/main" xmlns:p15="http://schemas.microsoft.com/office/powerpoint/2012/main" xmlns:ahyp="http://schemas.microsoft.com/office/drawing/2018/hyperlinkcolor">
+  <p:cSld>
+    <p:bg>
+      <p:bgPr>
+        <a:solidFill>
+          <a:srgbClr val="F8FAFC"/>
+        </a:solidFill>
+      </p:bgPr>
+    </p:bg>
+    <p:spTree>
+      <p:nvGrpSpPr>
+        <p:cNvPr id="113" name="Shape 113"/>
+        <p:cNvGrpSpPr/>
+        <p:nvPr/>
+      </p:nvGrpSpPr>
+      <p:grpSpPr>
+        <a:xfrm>
+          <a:off x="0" y="0"/>
+          <a:ext cx="0" cy="0"/>
+          <a:chOff x="0" y="0"/>
+          <a:chExt cx="0" cy="0"/>
+        </a:xfrm>
+      </p:grpSpPr>
+      <p:pic>
+        <p:nvPicPr>
+          <p:cNvPr descr="image.png" id="114" name="Google Shape;114;p16"/>
           <p:cNvPicPr preferRelativeResize="0"/>
           <p:nvPr/>
         </p:nvPicPr>
@@ -12081,7 +12555,7 @@
       </p:pic>
       <p:pic>
         <p:nvPicPr>
-          <p:cNvPr descr="image.png" id="110" name="Google Shape;110;p15"/>
+          <p:cNvPr descr="image.png" id="115" name="Google Shape;115;p16"/>
           <p:cNvPicPr preferRelativeResize="0"/>
           <p:nvPr/>
         </p:nvPicPr>
@@ -12108,7 +12582,7 @@
       </p:pic>
       <p:pic>
         <p:nvPicPr>
-          <p:cNvPr descr="image.png" id="111" name="Google Shape;111;p15"/>
+          <p:cNvPr descr="image.png" id="116" name="Google Shape;116;p16"/>
           <p:cNvPicPr preferRelativeResize="0"/>
           <p:nvPr/>
         </p:nvPicPr>
@@ -12135,7 +12609,7 @@
       </p:pic>
       <p:pic>
         <p:nvPicPr>
-          <p:cNvPr descr="image.png" id="112" name="Google Shape;112;p15"/>
+          <p:cNvPr descr="image.png" id="117" name="Google Shape;117;p16"/>
           <p:cNvPicPr preferRelativeResize="0"/>
           <p:nvPr/>
         </p:nvPicPr>
@@ -12162,7 +12636,7 @@
       </p:pic>
       <p:pic>
         <p:nvPicPr>
-          <p:cNvPr descr="image.png" id="113" name="Google Shape;113;p15"/>
+          <p:cNvPr descr="image.png" id="118" name="Google Shape;118;p16"/>
           <p:cNvPicPr preferRelativeResize="0"/>
           <p:nvPr/>
         </p:nvPicPr>
@@ -12189,7 +12663,7 @@
       </p:pic>
       <p:sp>
         <p:nvSpPr>
-          <p:cNvPr id="114" name="Google Shape;114;p15"/>
+          <p:cNvPr id="119" name="Google Shape;119;p16"/>
           <p:cNvSpPr txBox="1"/>
           <p:nvPr/>
         </p:nvSpPr>
@@ -12239,7 +12713,7 @@
       </p:sp>
       <p:sp>
         <p:nvSpPr>
-          <p:cNvPr id="115" name="Google Shape;115;p15"/>
+          <p:cNvPr id="120" name="Google Shape;120;p16"/>
           <p:cNvSpPr txBox="1"/>
           <p:nvPr/>
         </p:nvSpPr>
@@ -12304,7 +12778,7 @@
       </p:sp>
       <p:sp>
         <p:nvSpPr>
-          <p:cNvPr id="116" name="Google Shape;116;p15"/>
+          <p:cNvPr id="121" name="Google Shape;121;p16"/>
           <p:cNvSpPr txBox="1"/>
           <p:nvPr/>
         </p:nvSpPr>
@@ -12369,7 +12843,7 @@
       </p:sp>
       <p:pic>
         <p:nvPicPr>
-          <p:cNvPr descr="image.png" id="117" name="Google Shape;117;p15"/>
+          <p:cNvPr descr="image.png" id="122" name="Google Shape;122;p16"/>
           <p:cNvPicPr preferRelativeResize="0"/>
           <p:nvPr/>
         </p:nvPicPr>
@@ -12396,7 +12870,7 @@
       </p:pic>
       <p:sp>
         <p:nvSpPr>
-          <p:cNvPr id="118" name="Google Shape;118;p15"/>
+          <p:cNvPr id="123" name="Google Shape;123;p16"/>
           <p:cNvSpPr txBox="1"/>
           <p:nvPr/>
         </p:nvSpPr>
@@ -12446,7 +12920,7 @@
       </p:sp>
       <p:sp>
         <p:nvSpPr>
-          <p:cNvPr id="119" name="Google Shape;119;p15"/>
+          <p:cNvPr id="124" name="Google Shape;124;p16"/>
           <p:cNvSpPr txBox="1"/>
           <p:nvPr/>
         </p:nvSpPr>
@@ -12499,7 +12973,7 @@
       </p:sp>
       <p:sp>
         <p:nvSpPr>
-          <p:cNvPr id="120" name="Google Shape;120;p15"/>
+          <p:cNvPr id="125" name="Google Shape;125;p16"/>
           <p:cNvSpPr txBox="1"/>
           <p:nvPr/>
         </p:nvSpPr>
@@ -12564,7 +13038,7 @@
       </p:sp>
       <p:sp>
         <p:nvSpPr>
-          <p:cNvPr id="121" name="Google Shape;121;p15"/>
+          <p:cNvPr id="126" name="Google Shape;126;p16"/>
           <p:cNvSpPr txBox="1"/>
           <p:nvPr/>
         </p:nvSpPr>
@@ -12629,7 +13103,7 @@
       </p:sp>
       <p:pic>
         <p:nvPicPr>
-          <p:cNvPr descr="image.png" id="122" name="Google Shape;122;p15"/>
+          <p:cNvPr descr="image.png" id="127" name="Google Shape;127;p16"/>
           <p:cNvPicPr preferRelativeResize="0"/>
           <p:nvPr/>
         </p:nvPicPr>
@@ -12656,7 +13130,7 @@
       </p:pic>
       <p:sp>
         <p:nvSpPr>
-          <p:cNvPr id="123" name="Google Shape;123;p15"/>
+          <p:cNvPr id="128" name="Google Shape;128;p16"/>
           <p:cNvSpPr txBox="1"/>
           <p:nvPr/>
         </p:nvSpPr>
@@ -12706,7 +13180,7 @@
       </p:sp>
       <p:sp>
         <p:nvSpPr>
-          <p:cNvPr id="124" name="Google Shape;124;p15"/>
+          <p:cNvPr id="129" name="Google Shape;129;p16"/>
           <p:cNvSpPr txBox="1"/>
           <p:nvPr/>
         </p:nvSpPr>
@@ -12759,7 +13233,7 @@
       </p:sp>
       <p:sp>
         <p:nvSpPr>
-          <p:cNvPr id="125" name="Google Shape;125;p15"/>
+          <p:cNvPr id="130" name="Google Shape;130;p16"/>
           <p:cNvSpPr txBox="1"/>
           <p:nvPr/>
         </p:nvSpPr>
@@ -12812,7 +13286,7 @@
       </p:sp>
       <p:pic>
         <p:nvPicPr>
-          <p:cNvPr descr="image.png" id="126" name="Google Shape;126;p15"/>
+          <p:cNvPr descr="image.png" id="131" name="Google Shape;131;p16"/>
           <p:cNvPicPr preferRelativeResize="0"/>
           <p:nvPr/>
         </p:nvPicPr>
@@ -12839,7 +13313,7 @@
       </p:pic>
       <p:pic>
         <p:nvPicPr>
-          <p:cNvPr descr="image.png" id="127" name="Google Shape;127;p15"/>
+          <p:cNvPr descr="image.png" id="132" name="Google Shape;132;p16"/>
           <p:cNvPicPr preferRelativeResize="0"/>
           <p:nvPr/>
         </p:nvPicPr>
@@ -12866,7 +13340,7 @@
       </p:pic>
       <p:pic>
         <p:nvPicPr>
-          <p:cNvPr descr="image.png" id="128" name="Google Shape;128;p15"/>
+          <p:cNvPr descr="image.png" id="133" name="Google Shape;133;p16"/>
           <p:cNvPicPr preferRelativeResize="0"/>
           <p:nvPr/>
         </p:nvPicPr>
@@ -12893,7 +13367,7 @@
       </p:pic>
       <p:sp>
         <p:nvSpPr>
-          <p:cNvPr id="129" name="Google Shape;129;p15"/>
+          <p:cNvPr id="134" name="Google Shape;134;p16"/>
           <p:cNvSpPr txBox="1"/>
           <p:nvPr/>
         </p:nvSpPr>
@@ -12949,19 +13423,19 @@
 </p:sld>
 </file>
 
-<file path=ppt/slides/slide4.xml><?xml version="1.0" encoding="utf-8"?>
+<file path=ppt/slides/slide5.xml><?xml version="1.0" encoding="utf-8"?>
 <p:sld xmlns:a="http://schemas.openxmlformats.org/drawingml/2006/main" xmlns:r="http://schemas.openxmlformats.org/officeDocument/2006/relationships" xmlns:mc="http://schemas.openxmlformats.org/markup-compatibility/2006" xmlns:mv="urn:schemas-microsoft-com:mac:vml" xmlns:p="http://schemas.openxmlformats.org/presentationml/2006/main" xmlns:c="http://schemas.openxmlformats.org/drawingml/2006/chart" xmlns:dgm="http://schemas.openxmlformats.org/drawingml/2006/diagram" xmlns:o="urn:schemas-microsoft-com:office:office" xmlns:v="urn:schemas-microsoft-com:vml" xmlns:pvml="urn:schemas-microsoft-com:office:powerpoint" xmlns:com="http://schemas.openxmlformats.org/drawingml/2006/compatibility" xmlns:p14="http://schemas.microsoft.com/office/powerpoint/2010/main" xmlns:p15="http://schemas.microsoft.com/office/powerpoint/2012/main" xmlns:ahyp="http://schemas.microsoft.com/office/drawing/2018/hyperlinkcolor">
   <p:cSld>
     <p:bg>
       <p:bgPr>
         <a:solidFill>
-          <a:srgbClr val="FFFFFF"/>
+          <a:srgbClr val="F8FAFC"/>
         </a:solidFill>
       </p:bgPr>
     </p:bg>
     <p:spTree>
       <p:nvGrpSpPr>
-        <p:cNvPr id="133" name="Shape 133"/>
+        <p:cNvPr id="138" name="Shape 138"/>
         <p:cNvGrpSpPr/>
         <p:nvPr/>
       </p:nvGrpSpPr>
@@ -12975,7 +13449,7 @@
       </p:grpSpPr>
       <p:pic>
         <p:nvPicPr>
-          <p:cNvPr descr="image.png" id="134" name="Google Shape;134;p16"/>
+          <p:cNvPr descr="image.png" id="139" name="Google Shape;139;p17"/>
           <p:cNvPicPr preferRelativeResize="0"/>
           <p:nvPr/>
         </p:nvPicPr>
@@ -13002,94 +13476,7 @@
       </p:pic>
       <p:pic>
         <p:nvPicPr>
-          <p:cNvPr id="135" name="Google Shape;135;p16" title="sevilla_lts.png"/>
-          <p:cNvPicPr preferRelativeResize="0"/>
-          <p:nvPr/>
-        </p:nvPicPr>
-        <p:blipFill>
-          <a:blip r:embed="rId4">
-            <a:alphaModFix/>
-          </a:blip>
-          <a:stretch>
-            <a:fillRect/>
-          </a:stretch>
-        </p:blipFill>
-        <p:spPr>
-          <a:xfrm>
-            <a:off x="1644200" y="0"/>
-            <a:ext cx="8903596" cy="6858000"/>
-          </a:xfrm>
-          <a:prstGeom prst="rect">
-            <a:avLst/>
-          </a:prstGeom>
-          <a:noFill/>
-          <a:ln>
-            <a:noFill/>
-          </a:ln>
-        </p:spPr>
-      </p:pic>
-    </p:spTree>
-  </p:cSld>
-  <p:clrMapOvr>
-    <a:masterClrMapping/>
-  </p:clrMapOvr>
-</p:sld>
-</file>
-
-<file path=ppt/slides/slide5.xml><?xml version="1.0" encoding="utf-8"?>
-<p:sld xmlns:a="http://schemas.openxmlformats.org/drawingml/2006/main" xmlns:r="http://schemas.openxmlformats.org/officeDocument/2006/relationships" xmlns:mc="http://schemas.openxmlformats.org/markup-compatibility/2006" xmlns:mv="urn:schemas-microsoft-com:mac:vml" xmlns:p="http://schemas.openxmlformats.org/presentationml/2006/main" xmlns:c="http://schemas.openxmlformats.org/drawingml/2006/chart" xmlns:dgm="http://schemas.openxmlformats.org/drawingml/2006/diagram" xmlns:o="urn:schemas-microsoft-com:office:office" xmlns:v="urn:schemas-microsoft-com:vml" xmlns:pvml="urn:schemas-microsoft-com:office:powerpoint" xmlns:com="http://schemas.openxmlformats.org/drawingml/2006/compatibility" xmlns:p14="http://schemas.microsoft.com/office/powerpoint/2010/main" xmlns:p15="http://schemas.microsoft.com/office/powerpoint/2012/main" xmlns:ahyp="http://schemas.microsoft.com/office/drawing/2018/hyperlinkcolor">
-  <p:cSld>
-    <p:bg>
-      <p:bgPr>
-        <a:solidFill>
-          <a:srgbClr val="F8FAFC"/>
-        </a:solidFill>
-      </p:bgPr>
-    </p:bg>
-    <p:spTree>
-      <p:nvGrpSpPr>
-        <p:cNvPr id="139" name="Shape 139"/>
-        <p:cNvGrpSpPr/>
-        <p:nvPr/>
-      </p:nvGrpSpPr>
-      <p:grpSpPr>
-        <a:xfrm>
-          <a:off x="0" y="0"/>
-          <a:ext cx="0" cy="0"/>
-          <a:chOff x="0" y="0"/>
-          <a:chExt cx="0" cy="0"/>
-        </a:xfrm>
-      </p:grpSpPr>
-      <p:pic>
-        <p:nvPicPr>
           <p:cNvPr descr="image.png" id="140" name="Google Shape;140;p17"/>
-          <p:cNvPicPr preferRelativeResize="0"/>
-          <p:nvPr/>
-        </p:nvPicPr>
-        <p:blipFill rotWithShape="1">
-          <a:blip r:embed="rId3">
-            <a:alphaModFix/>
-          </a:blip>
-          <a:srcRect b="0" l="0" r="0" t="0"/>
-          <a:stretch/>
-        </p:blipFill>
-        <p:spPr>
-          <a:xfrm>
-            <a:off x="0" y="0"/>
-            <a:ext cx="12192000" cy="6858000"/>
-          </a:xfrm>
-          <a:prstGeom prst="rect">
-            <a:avLst/>
-          </a:prstGeom>
-          <a:noFill/>
-          <a:ln>
-            <a:noFill/>
-          </a:ln>
-        </p:spPr>
-      </p:pic>
-      <p:pic>
-        <p:nvPicPr>
-          <p:cNvPr descr="image.png" id="141" name="Google Shape;141;p17"/>
           <p:cNvPicPr preferRelativeResize="0"/>
           <p:nvPr/>
         </p:nvPicPr>
@@ -13116,7 +13503,7 @@
       </p:pic>
       <p:sp>
         <p:nvSpPr>
-          <p:cNvPr id="142" name="Google Shape;142;p17"/>
+          <p:cNvPr id="141" name="Google Shape;141;p17"/>
           <p:cNvSpPr txBox="1"/>
           <p:nvPr/>
         </p:nvSpPr>
@@ -13166,7 +13553,7 @@
       </p:sp>
       <p:sp>
         <p:nvSpPr>
-          <p:cNvPr id="143" name="Google Shape;143;p17"/>
+          <p:cNvPr id="142" name="Google Shape;142;p17"/>
           <p:cNvSpPr txBox="1"/>
           <p:nvPr/>
         </p:nvSpPr>
@@ -13243,7 +13630,7 @@
       </p:sp>
       <p:sp>
         <p:nvSpPr>
-          <p:cNvPr id="144" name="Google Shape;144;p17"/>
+          <p:cNvPr id="143" name="Google Shape;143;p17"/>
           <p:cNvSpPr txBox="1"/>
           <p:nvPr/>
         </p:nvSpPr>
@@ -13296,7 +13683,7 @@
       </p:sp>
       <p:sp>
         <p:nvSpPr>
-          <p:cNvPr id="145" name="Google Shape;145;p17"/>
+          <p:cNvPr id="144" name="Google Shape;144;p17"/>
           <p:cNvSpPr/>
           <p:nvPr/>
         </p:nvSpPr>
@@ -13347,7 +13734,7 @@
       </p:sp>
       <p:sp>
         <p:nvSpPr>
-          <p:cNvPr id="146" name="Google Shape;146;p17"/>
+          <p:cNvPr id="145" name="Google Shape;145;p17"/>
           <p:cNvSpPr txBox="1"/>
           <p:nvPr/>
         </p:nvSpPr>
@@ -13420,7 +13807,7 @@
       </p:sp>
       <p:sp>
         <p:nvSpPr>
-          <p:cNvPr id="147" name="Google Shape;147;p17"/>
+          <p:cNvPr id="146" name="Google Shape;146;p17"/>
           <p:cNvSpPr/>
           <p:nvPr/>
         </p:nvSpPr>
@@ -13471,7 +13858,7 @@
       </p:sp>
       <p:pic>
         <p:nvPicPr>
-          <p:cNvPr descr="image.png" id="148" name="Google Shape;148;p17"/>
+          <p:cNvPr descr="image.png" id="147" name="Google Shape;147;p17"/>
           <p:cNvPicPr preferRelativeResize="0"/>
           <p:nvPr/>
         </p:nvPicPr>
@@ -13498,7 +13885,7 @@
       </p:pic>
       <p:sp>
         <p:nvSpPr>
-          <p:cNvPr id="149" name="Google Shape;149;p17"/>
+          <p:cNvPr id="148" name="Google Shape;148;p17"/>
           <p:cNvSpPr txBox="1"/>
           <p:nvPr/>
         </p:nvSpPr>
@@ -13572,13 +13959,13 @@
     <p:bg>
       <p:bgPr>
         <a:solidFill>
-          <a:srgbClr val="F8FAFC"/>
+          <a:srgbClr val="FFFFFF"/>
         </a:solidFill>
       </p:bgPr>
     </p:bg>
     <p:spTree>
       <p:nvGrpSpPr>
-        <p:cNvPr id="153" name="Shape 153"/>
+        <p:cNvPr id="152" name="Shape 152"/>
         <p:cNvGrpSpPr/>
         <p:nvPr/>
       </p:nvGrpSpPr>
@@ -13592,7 +13979,7 @@
       </p:grpSpPr>
       <p:pic>
         <p:nvPicPr>
-          <p:cNvPr descr="image.png" id="154" name="Google Shape;154;p18"/>
+          <p:cNvPr descr="image.png" id="153" name="Google Shape;153;p18"/>
           <p:cNvPicPr preferRelativeResize="0"/>
           <p:nvPr/>
         </p:nvPicPr>
@@ -13619,7 +14006,94 @@
       </p:pic>
       <p:pic>
         <p:nvPicPr>
-          <p:cNvPr descr="image.png" id="155" name="Google Shape;155;p18"/>
+          <p:cNvPr id="154" name="Google Shape;154;p18" title="sevilla_lts.png"/>
+          <p:cNvPicPr preferRelativeResize="0"/>
+          <p:nvPr/>
+        </p:nvPicPr>
+        <p:blipFill>
+          <a:blip r:embed="rId4">
+            <a:alphaModFix/>
+          </a:blip>
+          <a:stretch>
+            <a:fillRect/>
+          </a:stretch>
+        </p:blipFill>
+        <p:spPr>
+          <a:xfrm>
+            <a:off x="1644200" y="0"/>
+            <a:ext cx="8903596" cy="6858000"/>
+          </a:xfrm>
+          <a:prstGeom prst="rect">
+            <a:avLst/>
+          </a:prstGeom>
+          <a:noFill/>
+          <a:ln>
+            <a:noFill/>
+          </a:ln>
+        </p:spPr>
+      </p:pic>
+    </p:spTree>
+  </p:cSld>
+  <p:clrMapOvr>
+    <a:masterClrMapping/>
+  </p:clrMapOvr>
+</p:sld>
+</file>
+
+<file path=ppt/slides/slide7.xml><?xml version="1.0" encoding="utf-8"?>
+<p:sld xmlns:a="http://schemas.openxmlformats.org/drawingml/2006/main" xmlns:r="http://schemas.openxmlformats.org/officeDocument/2006/relationships" xmlns:mc="http://schemas.openxmlformats.org/markup-compatibility/2006" xmlns:mv="urn:schemas-microsoft-com:mac:vml" xmlns:p="http://schemas.openxmlformats.org/presentationml/2006/main" xmlns:c="http://schemas.openxmlformats.org/drawingml/2006/chart" xmlns:dgm="http://schemas.openxmlformats.org/drawingml/2006/diagram" xmlns:o="urn:schemas-microsoft-com:office:office" xmlns:v="urn:schemas-microsoft-com:vml" xmlns:pvml="urn:schemas-microsoft-com:office:powerpoint" xmlns:com="http://schemas.openxmlformats.org/drawingml/2006/compatibility" xmlns:p14="http://schemas.microsoft.com/office/powerpoint/2010/main" xmlns:p15="http://schemas.microsoft.com/office/powerpoint/2012/main" xmlns:ahyp="http://schemas.microsoft.com/office/drawing/2018/hyperlinkcolor">
+  <p:cSld>
+    <p:bg>
+      <p:bgPr>
+        <a:solidFill>
+          <a:srgbClr val="F8FAFC"/>
+        </a:solidFill>
+      </p:bgPr>
+    </p:bg>
+    <p:spTree>
+      <p:nvGrpSpPr>
+        <p:cNvPr id="158" name="Shape 158"/>
+        <p:cNvGrpSpPr/>
+        <p:nvPr/>
+      </p:nvGrpSpPr>
+      <p:grpSpPr>
+        <a:xfrm>
+          <a:off x="0" y="0"/>
+          <a:ext cx="0" cy="0"/>
+          <a:chOff x="0" y="0"/>
+          <a:chExt cx="0" cy="0"/>
+        </a:xfrm>
+      </p:grpSpPr>
+      <p:pic>
+        <p:nvPicPr>
+          <p:cNvPr descr="image.png" id="159" name="Google Shape;159;p19"/>
+          <p:cNvPicPr preferRelativeResize="0"/>
+          <p:nvPr/>
+        </p:nvPicPr>
+        <p:blipFill rotWithShape="1">
+          <a:blip r:embed="rId3">
+            <a:alphaModFix/>
+          </a:blip>
+          <a:srcRect b="0" l="0" r="0" t="0"/>
+          <a:stretch/>
+        </p:blipFill>
+        <p:spPr>
+          <a:xfrm>
+            <a:off x="0" y="0"/>
+            <a:ext cx="12192000" cy="6858000"/>
+          </a:xfrm>
+          <a:prstGeom prst="rect">
+            <a:avLst/>
+          </a:prstGeom>
+          <a:noFill/>
+          <a:ln>
+            <a:noFill/>
+          </a:ln>
+        </p:spPr>
+      </p:pic>
+      <p:pic>
+        <p:nvPicPr>
+          <p:cNvPr descr="image.png" id="160" name="Google Shape;160;p19"/>
           <p:cNvPicPr preferRelativeResize="0"/>
           <p:nvPr/>
         </p:nvPicPr>
@@ -13646,7 +14120,7 @@
       </p:pic>
       <p:pic>
         <p:nvPicPr>
-          <p:cNvPr descr="image.png" id="156" name="Google Shape;156;p18"/>
+          <p:cNvPr descr="image.png" id="161" name="Google Shape;161;p19"/>
           <p:cNvPicPr preferRelativeResize="0"/>
           <p:nvPr/>
         </p:nvPicPr>
@@ -13673,7 +14147,7 @@
       </p:pic>
       <p:sp>
         <p:nvSpPr>
-          <p:cNvPr id="157" name="Google Shape;157;p18"/>
+          <p:cNvPr id="162" name="Google Shape;162;p19"/>
           <p:cNvSpPr txBox="1"/>
           <p:nvPr/>
         </p:nvSpPr>
@@ -13723,7 +14197,7 @@
       </p:sp>
       <p:sp>
         <p:nvSpPr>
-          <p:cNvPr id="158" name="Google Shape;158;p18"/>
+          <p:cNvPr id="163" name="Google Shape;163;p19"/>
           <p:cNvSpPr/>
           <p:nvPr/>
         </p:nvSpPr>
@@ -13774,7 +14248,7 @@
       </p:sp>
       <p:sp>
         <p:nvSpPr>
-          <p:cNvPr id="159" name="Google Shape;159;p18"/>
+          <p:cNvPr id="164" name="Google Shape;164;p19"/>
           <p:cNvSpPr txBox="1"/>
           <p:nvPr/>
         </p:nvSpPr>
@@ -13824,7 +14298,7 @@
       </p:sp>
       <p:sp>
         <p:nvSpPr>
-          <p:cNvPr id="160" name="Google Shape;160;p18"/>
+          <p:cNvPr id="165" name="Google Shape;165;p19"/>
           <p:cNvSpPr/>
           <p:nvPr/>
         </p:nvSpPr>
@@ -13875,7 +14349,7 @@
       </p:sp>
       <p:sp>
         <p:nvSpPr>
-          <p:cNvPr id="161" name="Google Shape;161;p18"/>
+          <p:cNvPr id="166" name="Google Shape;166;p19"/>
           <p:cNvSpPr txBox="1"/>
           <p:nvPr/>
         </p:nvSpPr>
@@ -13940,7 +14414,7 @@
       </p:sp>
       <p:sp>
         <p:nvSpPr>
-          <p:cNvPr id="162" name="Google Shape;162;p18"/>
+          <p:cNvPr id="167" name="Google Shape;167;p19"/>
           <p:cNvSpPr txBox="1"/>
           <p:nvPr/>
         </p:nvSpPr>
@@ -14005,7 +14479,7 @@
       </p:sp>
       <p:sp>
         <p:nvSpPr>
-          <p:cNvPr id="163" name="Google Shape;163;p18"/>
+          <p:cNvPr id="168" name="Google Shape;168;p19"/>
           <p:cNvSpPr txBox="1"/>
           <p:nvPr/>
         </p:nvSpPr>
@@ -14070,7 +14544,7 @@
       </p:sp>
       <p:sp>
         <p:nvSpPr>
-          <p:cNvPr id="164" name="Google Shape;164;p18"/>
+          <p:cNvPr id="169" name="Google Shape;169;p19"/>
           <p:cNvSpPr txBox="1"/>
           <p:nvPr/>
         </p:nvSpPr>
@@ -14135,7 +14609,7 @@
       </p:sp>
       <p:sp>
         <p:nvSpPr>
-          <p:cNvPr id="165" name="Google Shape;165;p18"/>
+          <p:cNvPr id="170" name="Google Shape;170;p19"/>
           <p:cNvSpPr txBox="1"/>
           <p:nvPr/>
         </p:nvSpPr>
@@ -14200,7 +14674,7 @@
       </p:sp>
       <p:sp>
         <p:nvSpPr>
-          <p:cNvPr id="166" name="Google Shape;166;p18"/>
+          <p:cNvPr id="171" name="Google Shape;171;p19"/>
           <p:cNvSpPr txBox="1"/>
           <p:nvPr/>
         </p:nvSpPr>
@@ -14265,7 +14739,7 @@
       </p:sp>
       <p:sp>
         <p:nvSpPr>
-          <p:cNvPr id="167" name="Google Shape;167;p18"/>
+          <p:cNvPr id="172" name="Google Shape;172;p19"/>
           <p:cNvSpPr txBox="1"/>
           <p:nvPr/>
         </p:nvSpPr>
@@ -14330,7 +14804,7 @@
       </p:sp>
       <p:sp>
         <p:nvSpPr>
-          <p:cNvPr id="168" name="Google Shape;168;p18"/>
+          <p:cNvPr id="173" name="Google Shape;173;p19"/>
           <p:cNvSpPr txBox="1"/>
           <p:nvPr/>
         </p:nvSpPr>
@@ -14395,7 +14869,7 @@
       </p:sp>
       <p:sp>
         <p:nvSpPr>
-          <p:cNvPr id="169" name="Google Shape;169;p18"/>
+          <p:cNvPr id="174" name="Google Shape;174;p19"/>
           <p:cNvSpPr txBox="1"/>
           <p:nvPr/>
         </p:nvSpPr>
@@ -14460,7 +14934,7 @@
       </p:sp>
       <p:pic>
         <p:nvPicPr>
-          <p:cNvPr descr="image.png" id="170" name="Google Shape;170;p18"/>
+          <p:cNvPr descr="image.png" id="175" name="Google Shape;175;p19"/>
           <p:cNvPicPr preferRelativeResize="0"/>
           <p:nvPr/>
         </p:nvPicPr>
@@ -14487,7 +14961,7 @@
       </p:pic>
       <p:pic>
         <p:nvPicPr>
-          <p:cNvPr descr="image.png" id="171" name="Google Shape;171;p18"/>
+          <p:cNvPr descr="image.png" id="176" name="Google Shape;176;p19"/>
           <p:cNvPicPr preferRelativeResize="0"/>
           <p:nvPr/>
         </p:nvPicPr>
@@ -14514,7 +14988,7 @@
       </p:pic>
       <p:pic>
         <p:nvPicPr>
-          <p:cNvPr descr="image.png" id="172" name="Google Shape;172;p18"/>
+          <p:cNvPr descr="image.png" id="177" name="Google Shape;177;p19"/>
           <p:cNvPicPr preferRelativeResize="0"/>
           <p:nvPr/>
         </p:nvPicPr>
@@ -14541,7 +15015,7 @@
       </p:pic>
       <p:pic>
         <p:nvPicPr>
-          <p:cNvPr descr="image.png" id="173" name="Google Shape;173;p18"/>
+          <p:cNvPr descr="image.png" id="178" name="Google Shape;178;p19"/>
           <p:cNvPicPr preferRelativeResize="0"/>
           <p:nvPr/>
         </p:nvPicPr>
@@ -14568,7 +15042,7 @@
       </p:pic>
       <p:pic>
         <p:nvPicPr>
-          <p:cNvPr descr="image.png" id="174" name="Google Shape;174;p18"/>
+          <p:cNvPr descr="image.png" id="179" name="Google Shape;179;p19"/>
           <p:cNvPicPr preferRelativeResize="0"/>
           <p:nvPr/>
         </p:nvPicPr>
@@ -14595,7 +15069,7 @@
       </p:pic>
       <p:pic>
         <p:nvPicPr>
-          <p:cNvPr descr="image.png" id="175" name="Google Shape;175;p18"/>
+          <p:cNvPr descr="image.png" id="180" name="Google Shape;180;p19"/>
           <p:cNvPicPr preferRelativeResize="0"/>
           <p:nvPr/>
         </p:nvPicPr>
@@ -14622,7 +15096,7 @@
       </p:pic>
       <p:pic>
         <p:nvPicPr>
-          <p:cNvPr descr="image.png" id="176" name="Google Shape;176;p18"/>
+          <p:cNvPr descr="image.png" id="181" name="Google Shape;181;p19"/>
           <p:cNvPicPr preferRelativeResize="0"/>
           <p:nvPr/>
         </p:nvPicPr>
@@ -14649,7 +15123,7 @@
       </p:pic>
       <p:pic>
         <p:nvPicPr>
-          <p:cNvPr descr="image.png" id="177" name="Google Shape;177;p18"/>
+          <p:cNvPr descr="image.png" id="182" name="Google Shape;182;p19"/>
           <p:cNvPicPr preferRelativeResize="0"/>
           <p:nvPr/>
         </p:nvPicPr>
@@ -14676,7 +15150,7 @@
       </p:pic>
       <p:pic>
         <p:nvPicPr>
-          <p:cNvPr descr="image.png" id="178" name="Google Shape;178;p18"/>
+          <p:cNvPr descr="image.png" id="183" name="Google Shape;183;p19"/>
           <p:cNvPicPr preferRelativeResize="0"/>
           <p:nvPr/>
         </p:nvPicPr>
@@ -14703,7 +15177,7 @@
       </p:pic>
       <p:sp>
         <p:nvSpPr>
-          <p:cNvPr id="179" name="Google Shape;179;p18"/>
+          <p:cNvPr id="184" name="Google Shape;184;p19"/>
           <p:cNvSpPr txBox="1"/>
           <p:nvPr/>
         </p:nvSpPr>
@@ -14771,19 +15245,12 @@
 </p:sld>
 </file>
 
-<file path=ppt/slides/slide7.xml><?xml version="1.0" encoding="utf-8"?>
+<file path=ppt/slides/slide8.xml><?xml version="1.0" encoding="utf-8"?>
 <p:sld xmlns:a="http://schemas.openxmlformats.org/drawingml/2006/main" xmlns:r="http://schemas.openxmlformats.org/officeDocument/2006/relationships" xmlns:mc="http://schemas.openxmlformats.org/markup-compatibility/2006" xmlns:mv="urn:schemas-microsoft-com:mac:vml" xmlns:p="http://schemas.openxmlformats.org/presentationml/2006/main" xmlns:c="http://schemas.openxmlformats.org/drawingml/2006/chart" xmlns:dgm="http://schemas.openxmlformats.org/drawingml/2006/diagram" xmlns:o="urn:schemas-microsoft-com:office:office" xmlns:v="urn:schemas-microsoft-com:vml" xmlns:pvml="urn:schemas-microsoft-com:office:powerpoint" xmlns:com="http://schemas.openxmlformats.org/drawingml/2006/compatibility" xmlns:p14="http://schemas.microsoft.com/office/powerpoint/2010/main" xmlns:p15="http://schemas.microsoft.com/office/powerpoint/2012/main" xmlns:ahyp="http://schemas.microsoft.com/office/drawing/2018/hyperlinkcolor">
   <p:cSld>
-    <p:bg>
-      <p:bgPr>
-        <a:solidFill>
-          <a:srgbClr val="F8FAFC"/>
-        </a:solidFill>
-      </p:bgPr>
-    </p:bg>
     <p:spTree>
       <p:nvGrpSpPr>
-        <p:cNvPr id="183" name="Shape 183"/>
+        <p:cNvPr id="188" name="Shape 188"/>
         <p:cNvGrpSpPr/>
         <p:nvPr/>
       </p:nvGrpSpPr>
@@ -14797,7 +15264,67 @@
       </p:grpSpPr>
       <p:pic>
         <p:nvPicPr>
-          <p:cNvPr descr="image.png" id="184" name="Google Shape;184;p19"/>
+          <p:cNvPr id="189" name="Google Shape;189;p20"/>
+          <p:cNvPicPr preferRelativeResize="0"/>
+          <p:nvPr/>
+        </p:nvPicPr>
+        <p:blipFill>
+          <a:blip r:embed="rId3">
+            <a:alphaModFix/>
+          </a:blip>
+          <a:stretch>
+            <a:fillRect/>
+          </a:stretch>
+        </p:blipFill>
+        <p:spPr>
+          <a:xfrm>
+            <a:off x="152400" y="152400"/>
+            <a:ext cx="11887196" cy="6372760"/>
+          </a:xfrm>
+          <a:prstGeom prst="rect">
+            <a:avLst/>
+          </a:prstGeom>
+          <a:noFill/>
+          <a:ln>
+            <a:noFill/>
+          </a:ln>
+        </p:spPr>
+      </p:pic>
+    </p:spTree>
+  </p:cSld>
+  <p:clrMapOvr>
+    <a:masterClrMapping/>
+  </p:clrMapOvr>
+</p:sld>
+</file>
+
+<file path=ppt/slides/slide9.xml><?xml version="1.0" encoding="utf-8"?>
+<p:sld xmlns:a="http://schemas.openxmlformats.org/drawingml/2006/main" xmlns:r="http://schemas.openxmlformats.org/officeDocument/2006/relationships" xmlns:mc="http://schemas.openxmlformats.org/markup-compatibility/2006" xmlns:mv="urn:schemas-microsoft-com:mac:vml" xmlns:p="http://schemas.openxmlformats.org/presentationml/2006/main" xmlns:c="http://schemas.openxmlformats.org/drawingml/2006/chart" xmlns:dgm="http://schemas.openxmlformats.org/drawingml/2006/diagram" xmlns:o="urn:schemas-microsoft-com:office:office" xmlns:v="urn:schemas-microsoft-com:vml" xmlns:pvml="urn:schemas-microsoft-com:office:powerpoint" xmlns:com="http://schemas.openxmlformats.org/drawingml/2006/compatibility" xmlns:p14="http://schemas.microsoft.com/office/powerpoint/2010/main" xmlns:p15="http://schemas.microsoft.com/office/powerpoint/2012/main" xmlns:ahyp="http://schemas.microsoft.com/office/drawing/2018/hyperlinkcolor">
+  <p:cSld>
+    <p:bg>
+      <p:bgPr>
+        <a:solidFill>
+          <a:srgbClr val="F8FAFC"/>
+        </a:solidFill>
+      </p:bgPr>
+    </p:bg>
+    <p:spTree>
+      <p:nvGrpSpPr>
+        <p:cNvPr id="193" name="Shape 193"/>
+        <p:cNvGrpSpPr/>
+        <p:nvPr/>
+      </p:nvGrpSpPr>
+      <p:grpSpPr>
+        <a:xfrm>
+          <a:off x="0" y="0"/>
+          <a:ext cx="0" cy="0"/>
+          <a:chOff x="0" y="0"/>
+          <a:chExt cx="0" cy="0"/>
+        </a:xfrm>
+      </p:grpSpPr>
+      <p:pic>
+        <p:nvPicPr>
+          <p:cNvPr descr="image.png" id="194" name="Google Shape;194;p21"/>
           <p:cNvPicPr preferRelativeResize="0"/>
           <p:nvPr/>
         </p:nvPicPr>
@@ -14824,7 +15351,7 @@
       </p:pic>
       <p:pic>
         <p:nvPicPr>
-          <p:cNvPr descr="image.png" id="185" name="Google Shape;185;p19"/>
+          <p:cNvPr descr="image.png" id="195" name="Google Shape;195;p21"/>
           <p:cNvPicPr preferRelativeResize="0"/>
           <p:nvPr/>
         </p:nvPicPr>
@@ -14851,7 +15378,7 @@
       </p:pic>
       <p:pic>
         <p:nvPicPr>
-          <p:cNvPr descr="image.png" id="186" name="Google Shape;186;p19"/>
+          <p:cNvPr descr="image.png" id="196" name="Google Shape;196;p21"/>
           <p:cNvPicPr preferRelativeResize="0"/>
           <p:nvPr/>
         </p:nvPicPr>
@@ -14878,7 +15405,7 @@
       </p:pic>
       <p:pic>
         <p:nvPicPr>
-          <p:cNvPr descr="image.png" id="187" name="Google Shape;187;p19"/>
+          <p:cNvPr descr="image.png" id="197" name="Google Shape;197;p21"/>
           <p:cNvPicPr preferRelativeResize="0"/>
           <p:nvPr/>
         </p:nvPicPr>
@@ -14905,7 +15432,7 @@
       </p:pic>
       <p:pic>
         <p:nvPicPr>
-          <p:cNvPr descr="image.png" id="188" name="Google Shape;188;p19"/>
+          <p:cNvPr descr="image.png" id="198" name="Google Shape;198;p21"/>
           <p:cNvPicPr preferRelativeResize="0"/>
           <p:nvPr/>
         </p:nvPicPr>
@@ -14932,7 +15459,7 @@
       </p:pic>
       <p:sp>
         <p:nvSpPr>
-          <p:cNvPr id="189" name="Google Shape;189;p19"/>
+          <p:cNvPr id="199" name="Google Shape;199;p21"/>
           <p:cNvSpPr txBox="1"/>
           <p:nvPr/>
         </p:nvSpPr>
@@ -14982,7 +15509,7 @@
       </p:sp>
       <p:sp>
         <p:nvSpPr>
-          <p:cNvPr id="190" name="Google Shape;190;p19"/>
+          <p:cNvPr id="200" name="Google Shape;200;p21"/>
           <p:cNvSpPr txBox="1"/>
           <p:nvPr/>
         </p:nvSpPr>
@@ -15035,7 +15562,7 @@
       </p:sp>
       <p:sp>
         <p:nvSpPr>
-          <p:cNvPr id="191" name="Google Shape;191;p19"/>
+          <p:cNvPr id="201" name="Google Shape;201;p21"/>
           <p:cNvSpPr txBox="1"/>
           <p:nvPr/>
         </p:nvSpPr>
@@ -15112,7 +15639,7 @@
       </p:sp>
       <p:sp>
         <p:nvSpPr>
-          <p:cNvPr id="192" name="Google Shape;192;p19"/>
+          <p:cNvPr id="202" name="Google Shape;202;p21"/>
           <p:cNvSpPr txBox="1"/>
           <p:nvPr/>
         </p:nvSpPr>
@@ -15165,7 +15692,7 @@
       </p:sp>
       <p:sp>
         <p:nvSpPr>
-          <p:cNvPr id="193" name="Google Shape;193;p19"/>
+          <p:cNvPr id="203" name="Google Shape;203;p21"/>
           <p:cNvSpPr txBox="1"/>
           <p:nvPr/>
         </p:nvSpPr>
@@ -15218,7 +15745,7 @@
       </p:sp>
       <p:sp>
         <p:nvSpPr>
-          <p:cNvPr id="194" name="Google Shape;194;p19"/>
+          <p:cNvPr id="204" name="Google Shape;204;p21"/>
           <p:cNvSpPr txBox="1"/>
           <p:nvPr/>
         </p:nvSpPr>
@@ -15271,7 +15798,7 @@
       </p:sp>
       <p:sp>
         <p:nvSpPr>
-          <p:cNvPr id="195" name="Google Shape;195;p19"/>
+          <p:cNvPr id="205" name="Google Shape;205;p21"/>
           <p:cNvSpPr txBox="1"/>
           <p:nvPr/>
         </p:nvSpPr>
@@ -15324,7 +15851,7 @@
       </p:sp>
       <p:sp>
         <p:nvSpPr>
-          <p:cNvPr id="196" name="Google Shape;196;p19"/>
+          <p:cNvPr id="206" name="Google Shape;206;p21"/>
           <p:cNvSpPr txBox="1"/>
           <p:nvPr/>
         </p:nvSpPr>
@@ -15377,7 +15904,7 @@
       </p:sp>
       <p:sp>
         <p:nvSpPr>
-          <p:cNvPr id="197" name="Google Shape;197;p19"/>
+          <p:cNvPr id="207" name="Google Shape;207;p21"/>
           <p:cNvSpPr txBox="1"/>
           <p:nvPr/>
         </p:nvSpPr>
@@ -15430,7 +15957,7 @@
       </p:sp>
       <p:sp>
         <p:nvSpPr>
-          <p:cNvPr id="198" name="Google Shape;198;p19"/>
+          <p:cNvPr id="208" name="Google Shape;208;p21"/>
           <p:cNvSpPr txBox="1"/>
           <p:nvPr/>
         </p:nvSpPr>
@@ -15498,228 +16025,286 @@
 </p:sld>
 </file>
 
-<file path=ppt/slides/slide8.xml><?xml version="1.0" encoding="utf-8"?>
-<p:sld xmlns:a="http://schemas.openxmlformats.org/drawingml/2006/main" xmlns:r="http://schemas.openxmlformats.org/officeDocument/2006/relationships" xmlns:mc="http://schemas.openxmlformats.org/markup-compatibility/2006" xmlns:mv="urn:schemas-microsoft-com:mac:vml" xmlns:p="http://schemas.openxmlformats.org/presentationml/2006/main" xmlns:c="http://schemas.openxmlformats.org/drawingml/2006/chart" xmlns:dgm="http://schemas.openxmlformats.org/drawingml/2006/diagram" xmlns:o="urn:schemas-microsoft-com:office:office" xmlns:v="urn:schemas-microsoft-com:vml" xmlns:pvml="urn:schemas-microsoft-com:office:powerpoint" xmlns:com="http://schemas.openxmlformats.org/drawingml/2006/compatibility" xmlns:p14="http://schemas.microsoft.com/office/powerpoint/2010/main" xmlns:p15="http://schemas.microsoft.com/office/powerpoint/2012/main" xmlns:ahyp="http://schemas.microsoft.com/office/drawing/2018/hyperlinkcolor">
-  <p:cSld>
-    <p:bg>
-      <p:bgPr>
+<file path=ppt/theme/theme1.xml><?xml version="1.0" encoding="utf-8"?>
+<a:theme xmlns:a="http://schemas.openxmlformats.org/drawingml/2006/main" xmlns:r="http://schemas.openxmlformats.org/officeDocument/2006/relationships">
+  <a:themeElements>
+    <a:clrScheme name="Default">
+      <a:dk1>
+        <a:srgbClr val="000000"/>
+      </a:dk1>
+      <a:lt1>
+        <a:srgbClr val="FFFFFF"/>
+      </a:lt1>
+      <a:dk2>
+        <a:srgbClr val="158158"/>
+      </a:dk2>
+      <a:lt2>
+        <a:srgbClr val="F3F3F3"/>
+      </a:lt2>
+      <a:accent1>
+        <a:srgbClr val="058DC7"/>
+      </a:accent1>
+      <a:accent2>
+        <a:srgbClr val="50B432"/>
+      </a:accent2>
+      <a:accent3>
+        <a:srgbClr val="ED561B"/>
+      </a:accent3>
+      <a:accent4>
+        <a:srgbClr val="EDEF00"/>
+      </a:accent4>
+      <a:accent5>
+        <a:srgbClr val="24CBE5"/>
+      </a:accent5>
+      <a:accent6>
+        <a:srgbClr val="64E572"/>
+      </a:accent6>
+      <a:hlink>
+        <a:srgbClr val="2200CC"/>
+      </a:hlink>
+      <a:folHlink>
+        <a:srgbClr val="551A8B"/>
+      </a:folHlink>
+    </a:clrScheme>
+    <a:fontScheme name="Office">
+      <a:majorFont>
+        <a:latin typeface="Arial"/>
+        <a:ea typeface=""/>
+        <a:cs typeface=""/>
+        <a:font script="Jpan" typeface="ＭＳ Ｐゴシック"/>
+        <a:font script="Hang" typeface="맑은 고딕"/>
+        <a:font script="Hans" typeface="宋体"/>
+        <a:font script="Hant" typeface="新細明體"/>
+        <a:font script="Arab" typeface="Times New Roman"/>
+        <a:font script="Hebr" typeface="Times New Roman"/>
+        <a:font script="Thai" typeface="Angsana New"/>
+        <a:font script="Ethi" typeface="Nyala"/>
+        <a:font script="Beng" typeface="Vrinda"/>
+        <a:font script="Gujr" typeface="Shruti"/>
+        <a:font script="Khmr" typeface="MoolBoran"/>
+        <a:font script="Knda" typeface="Tunga"/>
+        <a:font script="Guru" typeface="Raavi"/>
+        <a:font script="Cans" typeface="Euphemia"/>
+        <a:font script="Cher" typeface="Plantagenet Cherokee"/>
+        <a:font script="Yiii" typeface="Microsoft Yi Baiti"/>
+        <a:font script="Tibt" typeface="Microsoft Himalaya"/>
+        <a:font script="Thaa" typeface="MV Boli"/>
+        <a:font script="Deva" typeface="Mangal"/>
+        <a:font script="Telu" typeface="Gautami"/>
+        <a:font script="Taml" typeface="Latha"/>
+        <a:font script="Syrc" typeface="Estrangelo Edessa"/>
+        <a:font script="Orya" typeface="Kalinga"/>
+        <a:font script="Mlym" typeface="Kartika"/>
+        <a:font script="Laoo" typeface="DokChampa"/>
+        <a:font script="Sinh" typeface="Iskoola Pota"/>
+        <a:font script="Mong" typeface="Mongolian Baiti"/>
+        <a:font script="Viet" typeface="Times New Roman"/>
+        <a:font script="Uigh" typeface="Microsoft Uighur"/>
+        <a:font script="Geor" typeface="Sylfaen"/>
+      </a:majorFont>
+      <a:minorFont>
+        <a:latin typeface="Arial"/>
+        <a:ea typeface=""/>
+        <a:cs typeface=""/>
+        <a:font script="Jpan" typeface="ＭＳ Ｐゴシック"/>
+        <a:font script="Hang" typeface="맑은 고딕"/>
+        <a:font script="Hans" typeface="宋体"/>
+        <a:font script="Hant" typeface="新細明體"/>
+        <a:font script="Arab" typeface="Arial"/>
+        <a:font script="Hebr" typeface="Arial"/>
+        <a:font script="Thai" typeface="Cordia New"/>
+        <a:font script="Ethi" typeface="Nyala"/>
+        <a:font script="Beng" typeface="Vrinda"/>
+        <a:font script="Gujr" typeface="Shruti"/>
+        <a:font script="Khmr" typeface="DaunPenh"/>
+        <a:font script="Knda" typeface="Tunga"/>
+        <a:font script="Guru" typeface="Raavi"/>
+        <a:font script="Cans" typeface="Euphemia"/>
+        <a:font script="Cher" typeface="Plantagenet Cherokee"/>
+        <a:font script="Yiii" typeface="Microsoft Yi Baiti"/>
+        <a:font script="Tibt" typeface="Microsoft Himalaya"/>
+        <a:font script="Thaa" typeface="MV Boli"/>
+        <a:font script="Deva" typeface="Mangal"/>
+        <a:font script="Telu" typeface="Gautami"/>
+        <a:font script="Taml" typeface="Latha"/>
+        <a:font script="Syrc" typeface="Estrangelo Edessa"/>
+        <a:font script="Orya" typeface="Kalinga"/>
+        <a:font script="Mlym" typeface="Kartika"/>
+        <a:font script="Laoo" typeface="DokChampa"/>
+        <a:font script="Sinh" typeface="Iskoola Pota"/>
+        <a:font script="Mong" typeface="Mongolian Baiti"/>
+        <a:font script="Viet" typeface="Arial"/>
+        <a:font script="Uigh" typeface="Microsoft Uighur"/>
+        <a:font script="Geor" typeface="Sylfaen"/>
+      </a:minorFont>
+    </a:fontScheme>
+    <a:fmtScheme name="Office">
+      <a:fillStyleLst>
         <a:solidFill>
-          <a:srgbClr val="F8FAFC"/>
+          <a:schemeClr val="phClr"/>
         </a:solidFill>
-      </p:bgPr>
-    </p:bg>
-    <p:spTree>
-      <p:nvGrpSpPr>
-        <p:cNvPr id="202" name="Shape 202"/>
-        <p:cNvGrpSpPr/>
-        <p:nvPr/>
-      </p:nvGrpSpPr>
-      <p:grpSpPr>
-        <a:xfrm>
-          <a:off x="0" y="0"/>
-          <a:ext cx="0" cy="0"/>
-          <a:chOff x="0" y="0"/>
-          <a:chExt cx="0" cy="0"/>
-        </a:xfrm>
-      </p:grpSpPr>
-      <p:pic>
-        <p:nvPicPr>
-          <p:cNvPr descr="image.png" id="203" name="Google Shape;203;p20"/>
-          <p:cNvPicPr preferRelativeResize="0"/>
-          <p:nvPr/>
-        </p:nvPicPr>
-        <p:blipFill rotWithShape="1">
-          <a:blip r:embed="rId3">
-            <a:alphaModFix/>
-          </a:blip>
-          <a:srcRect b="0" l="0" r="0" t="0"/>
-          <a:stretch/>
-        </p:blipFill>
-        <p:spPr>
-          <a:xfrm>
-            <a:off x="0" y="0"/>
-            <a:ext cx="12192000" cy="6858000"/>
-          </a:xfrm>
-          <a:prstGeom prst="rect">
-            <a:avLst/>
-          </a:prstGeom>
-          <a:noFill/>
-          <a:ln>
-            <a:noFill/>
-          </a:ln>
-        </p:spPr>
-      </p:pic>
-      <p:pic>
-        <p:nvPicPr>
-          <p:cNvPr descr="image.png" id="204" name="Google Shape;204;p20">
-            <a:hlinkClick r:id="rId4"/>
-          </p:cNvPr>
-          <p:cNvPicPr preferRelativeResize="0"/>
-          <p:nvPr/>
-        </p:nvPicPr>
-        <p:blipFill rotWithShape="1">
-          <a:blip r:embed="rId5">
-            <a:alphaModFix/>
-          </a:blip>
-          <a:srcRect b="0" l="0" r="0" t="0"/>
-          <a:stretch/>
-        </p:blipFill>
-        <p:spPr>
-          <a:xfrm>
-            <a:off x="4191000" y="4347120"/>
-            <a:ext cx="3810000" cy="447675"/>
-          </a:xfrm>
-          <a:prstGeom prst="rect">
-            <a:avLst/>
-          </a:prstGeom>
-          <a:noFill/>
-          <a:ln>
-            <a:noFill/>
-          </a:ln>
-        </p:spPr>
-      </p:pic>
-      <p:sp>
-        <p:nvSpPr>
-          <p:cNvPr id="205" name="Google Shape;205;p20"/>
-          <p:cNvSpPr txBox="1"/>
-          <p:nvPr/>
-        </p:nvSpPr>
-        <p:spPr>
-          <a:xfrm>
-            <a:off x="4062412" y="2063055"/>
-            <a:ext cx="4067175" cy="1238250"/>
-          </a:xfrm>
-          <a:prstGeom prst="rect">
-            <a:avLst/>
-          </a:prstGeom>
-          <a:noFill/>
-          <a:ln>
-            <a:noFill/>
-          </a:ln>
-        </p:spPr>
-        <p:txBody>
-          <a:bodyPr anchorCtr="0" anchor="t" bIns="0" lIns="666750" spcFirstLastPara="1" rIns="0" wrap="square" tIns="0">
-            <a:spAutoFit/>
-          </a:bodyPr>
-          <a:lstStyle/>
-          <a:p>
-            <a:pPr indent="0" lvl="0" marL="0" marR="0" rtl="0" algn="ctr">
-              <a:lnSpc>
-                <a:spcPct val="110000"/>
-              </a:lnSpc>
-              <a:spcBef>
-                <a:spcPts val="0"/>
-              </a:spcBef>
-              <a:spcAft>
-                <a:spcPts val="0"/>
-              </a:spcAft>
-              <a:buNone/>
-            </a:pPr>
-            <a:r>
-              <a:rPr b="0" i="0" lang="en-US" sz="8250" u="none" cap="none" strike="noStrike">
-                <a:solidFill>
-                  <a:srgbClr val="EA580C"/>
-                </a:solidFill>
-                <a:latin typeface="Outfit ExtraBold"/>
-                <a:ea typeface="Outfit ExtraBold"/>
-                <a:cs typeface="Outfit ExtraBold"/>
-                <a:sym typeface="Outfit ExtraBold"/>
-              </a:rPr>
-              <a:t>DEMO</a:t>
-            </a:r>
-            <a:endParaRPr/>
-          </a:p>
-        </p:txBody>
-      </p:sp>
-      <p:sp>
-        <p:nvSpPr>
-          <p:cNvPr id="206" name="Google Shape;206;p20"/>
-          <p:cNvSpPr txBox="1"/>
-          <p:nvPr/>
-        </p:nvSpPr>
-        <p:spPr>
-          <a:xfrm>
-            <a:off x="2200275" y="3491805"/>
-            <a:ext cx="7791450" cy="426690"/>
-          </a:xfrm>
-          <a:prstGeom prst="rect">
-            <a:avLst/>
-          </a:prstGeom>
-          <a:noFill/>
-          <a:ln>
-            <a:noFill/>
-          </a:ln>
-        </p:spPr>
-        <p:txBody>
-          <a:bodyPr anchorCtr="0" anchor="t" bIns="0" lIns="0" spcFirstLastPara="1" rIns="0" wrap="square" tIns="0">
-            <a:spAutoFit/>
-          </a:bodyPr>
-          <a:lstStyle/>
-          <a:p>
-            <a:pPr indent="0" lvl="0" marL="0" marR="0" rtl="0" algn="ctr">
-              <a:lnSpc>
-                <a:spcPct val="159952"/>
-              </a:lnSpc>
-              <a:spcBef>
-                <a:spcPts val="0"/>
-              </a:spcBef>
-              <a:spcAft>
-                <a:spcPts val="0"/>
-              </a:spcAft>
-              <a:buNone/>
-            </a:pPr>
-            <a:r>
-              <a:rPr b="0" i="0" lang="en-US" sz="2100" u="none" cap="none" strike="noStrike">
-                <a:solidFill>
-                  <a:srgbClr val="64748B"/>
-                </a:solidFill>
-                <a:latin typeface="Inter"/>
-                <a:ea typeface="Inter"/>
-                <a:cs typeface="Inter"/>
-                <a:sym typeface="Inter"/>
-              </a:rPr>
-              <a:t>Prueba el simulador interactivo de intervenciones sostenibles</a:t>
-            </a:r>
-            <a:endParaRPr/>
-          </a:p>
-        </p:txBody>
-      </p:sp>
-      <p:pic>
-        <p:nvPicPr>
-          <p:cNvPr descr="image.png" id="207" name="Google Shape;207;p20"/>
-          <p:cNvPicPr preferRelativeResize="0"/>
-          <p:nvPr/>
-        </p:nvPicPr>
-        <p:blipFill rotWithShape="1">
-          <a:blip r:embed="rId6">
-            <a:alphaModFix/>
-          </a:blip>
-          <a:srcRect b="0" l="0" r="0" t="0"/>
-          <a:stretch/>
-        </p:blipFill>
-        <p:spPr>
-          <a:xfrm>
-            <a:off x="8214137" y="2405530"/>
-            <a:ext cx="666750" cy="666750"/>
-          </a:xfrm>
-          <a:prstGeom prst="rect">
-            <a:avLst/>
-          </a:prstGeom>
-          <a:noFill/>
-          <a:ln>
-            <a:noFill/>
-          </a:ln>
-        </p:spPr>
-      </p:pic>
-    </p:spTree>
-  </p:cSld>
-  <p:clrMapOvr>
-    <a:masterClrMapping/>
-  </p:clrMapOvr>
-</p:sld>
+        <a:gradFill rotWithShape="1">
+          <a:gsLst>
+            <a:gs pos="0">
+              <a:schemeClr val="phClr">
+                <a:tint val="50000"/>
+                <a:satMod val="300000"/>
+              </a:schemeClr>
+            </a:gs>
+            <a:gs pos="35000">
+              <a:schemeClr val="phClr">
+                <a:tint val="37000"/>
+                <a:satMod val="300000"/>
+              </a:schemeClr>
+            </a:gs>
+            <a:gs pos="100000">
+              <a:schemeClr val="phClr">
+                <a:tint val="15000"/>
+                <a:satMod val="350000"/>
+              </a:schemeClr>
+            </a:gs>
+          </a:gsLst>
+          <a:lin ang="16200000" scaled="1"/>
+        </a:gradFill>
+        <a:gradFill rotWithShape="1">
+          <a:gsLst>
+            <a:gs pos="0">
+              <a:schemeClr val="phClr">
+                <a:tint val="100000"/>
+                <a:shade val="100000"/>
+                <a:satMod val="130000"/>
+              </a:schemeClr>
+            </a:gs>
+            <a:gs pos="100000">
+              <a:schemeClr val="phClr">
+                <a:tint val="50000"/>
+                <a:shade val="100000"/>
+                <a:satMod val="350000"/>
+              </a:schemeClr>
+            </a:gs>
+          </a:gsLst>
+          <a:lin ang="16200000" scaled="0"/>
+        </a:gradFill>
+      </a:fillStyleLst>
+      <a:lnStyleLst>
+        <a:ln w="9525" cap="flat" cmpd="sng" algn="ctr">
+          <a:solidFill>
+            <a:schemeClr val="phClr">
+              <a:shade val="95000"/>
+              <a:satMod val="105000"/>
+            </a:schemeClr>
+          </a:solidFill>
+          <a:prstDash val="solid"/>
+        </a:ln>
+        <a:ln w="25400" cap="flat" cmpd="sng" algn="ctr">
+          <a:solidFill>
+            <a:schemeClr val="phClr"/>
+          </a:solidFill>
+          <a:prstDash val="solid"/>
+        </a:ln>
+        <a:ln w="38100" cap="flat" cmpd="sng" algn="ctr">
+          <a:solidFill>
+            <a:schemeClr val="phClr"/>
+          </a:solidFill>
+          <a:prstDash val="solid"/>
+        </a:ln>
+      </a:lnStyleLst>
+      <a:effectStyleLst>
+        <a:effectStyle>
+          <a:effectLst>
+            <a:outerShdw blurRad="40000" dist="20000" dir="5400000" rotWithShape="0">
+              <a:srgbClr val="000000">
+                <a:alpha val="38000"/>
+              </a:srgbClr>
+            </a:outerShdw>
+          </a:effectLst>
+        </a:effectStyle>
+        <a:effectStyle>
+          <a:effectLst>
+            <a:outerShdw blurRad="40000" dist="23000" dir="5400000" rotWithShape="0">
+              <a:srgbClr val="000000">
+                <a:alpha val="35000"/>
+              </a:srgbClr>
+            </a:outerShdw>
+          </a:effectLst>
+        </a:effectStyle>
+        <a:effectStyle>
+          <a:effectLst>
+            <a:outerShdw blurRad="40000" dist="23000" dir="5400000" rotWithShape="0">
+              <a:srgbClr val="000000">
+                <a:alpha val="35000"/>
+              </a:srgbClr>
+            </a:outerShdw>
+          </a:effectLst>
+          <a:scene3d>
+            <a:camera prst="orthographicFront">
+              <a:rot lat="0" lon="0" rev="0"/>
+            </a:camera>
+            <a:lightRig rig="threePt" dir="t">
+              <a:rot lat="0" lon="0" rev="1200000"/>
+            </a:lightRig>
+          </a:scene3d>
+          <a:sp3d>
+            <a:bevelT w="63500" h="25400"/>
+          </a:sp3d>
+        </a:effectStyle>
+      </a:effectStyleLst>
+      <a:bgFillStyleLst>
+        <a:solidFill>
+          <a:schemeClr val="phClr"/>
+        </a:solidFill>
+        <a:gradFill rotWithShape="1">
+          <a:gsLst>
+            <a:gs pos="0">
+              <a:schemeClr val="phClr">
+                <a:tint val="40000"/>
+                <a:satMod val="350000"/>
+              </a:schemeClr>
+            </a:gs>
+            <a:gs pos="40000">
+              <a:schemeClr val="phClr">
+                <a:tint val="45000"/>
+                <a:shade val="99000"/>
+                <a:satMod val="350000"/>
+              </a:schemeClr>
+            </a:gs>
+            <a:gs pos="100000">
+              <a:schemeClr val="phClr">
+                <a:shade val="20000"/>
+                <a:satMod val="255000"/>
+              </a:schemeClr>
+            </a:gs>
+          </a:gsLst>
+          <a:path path="circle">
+            <a:fillToRect l="50000" t="-80000" r="50000" b="180000"/>
+          </a:path>
+        </a:gradFill>
+        <a:gradFill rotWithShape="1">
+          <a:gsLst>
+            <a:gs pos="0">
+              <a:schemeClr val="phClr">
+                <a:tint val="80000"/>
+                <a:satMod val="300000"/>
+              </a:schemeClr>
+            </a:gs>
+            <a:gs pos="100000">
+              <a:schemeClr val="phClr">
+                <a:shade val="30000"/>
+                <a:satMod val="200000"/>
+              </a:schemeClr>
+            </a:gs>
+          </a:gsLst>
+          <a:path path="circle">
+            <a:fillToRect l="50000" t="50000" r="50000" b="50000"/>
+          </a:path>
+        </a:gradFill>
+      </a:bgFillStyleLst>
+    </a:fmtScheme>
+  </a:themeElements>
+</a:theme>
 </file>
 
-<file path=ppt/theme/theme1.xml><?xml version="1.0" encoding="utf-8"?>
+<file path=ppt/theme/theme2.xml><?xml version="1.0" encoding="utf-8"?>
 <a:theme xmlns:a="http://schemas.openxmlformats.org/drawingml/2006/main" xmlns:r="http://schemas.openxmlformats.org/officeDocument/2006/relationships" name="Office Theme">
   <a:themeElements>
     <a:clrScheme name="Office">
@@ -15996,283 +16581,4 @@
     </a:fmtScheme>
   </a:themeElements>
 </a:theme>
-</file>
-
-<file path=ppt/theme/theme2.xml><?xml version="1.0" encoding="utf-8"?>
-<a:theme xmlns:a="http://schemas.openxmlformats.org/drawingml/2006/main" xmlns:r="http://schemas.openxmlformats.org/officeDocument/2006/relationships">
-  <a:themeElements>
-    <a:clrScheme name="Default">
-      <a:dk1>
-        <a:srgbClr val="000000"/>
-      </a:dk1>
-      <a:lt1>
-        <a:srgbClr val="FFFFFF"/>
-      </a:lt1>
-      <a:dk2>
-        <a:srgbClr val="158158"/>
-      </a:dk2>
-      <a:lt2>
-        <a:srgbClr val="F3F3F3"/>
-      </a:lt2>
-      <a:accent1>
-        <a:srgbClr val="058DC7"/>
-      </a:accent1>
-      <a:accent2>
-        <a:srgbClr val="50B432"/>
-      </a:accent2>
-      <a:accent3>
-        <a:srgbClr val="ED561B"/>
-      </a:accent3>
-      <a:accent4>
-        <a:srgbClr val="EDEF00"/>
-      </a:accent4>
-      <a:accent5>
-        <a:srgbClr val="24CBE5"/>
-      </a:accent5>
-      <a:accent6>
-        <a:srgbClr val="64E572"/>
-      </a:accent6>
-      <a:hlink>
-        <a:srgbClr val="2200CC"/>
-      </a:hlink>
-      <a:folHlink>
-        <a:srgbClr val="551A8B"/>
-      </a:folHlink>
-    </a:clrScheme>
-    <a:fontScheme name="Office">
-      <a:majorFont>
-        <a:latin typeface="Arial"/>
-        <a:ea typeface=""/>
-        <a:cs typeface=""/>
-        <a:font script="Jpan" typeface="ＭＳ Ｐゴシック"/>
-        <a:font script="Hang" typeface="맑은 고딕"/>
-        <a:font script="Hans" typeface="宋体"/>
-        <a:font script="Hant" typeface="新細明體"/>
-        <a:font script="Arab" typeface="Times New Roman"/>
-        <a:font script="Hebr" typeface="Times New Roman"/>
-        <a:font script="Thai" typeface="Angsana New"/>
-        <a:font script="Ethi" typeface="Nyala"/>
-        <a:font script="Beng" typeface="Vrinda"/>
-        <a:font script="Gujr" typeface="Shruti"/>
-        <a:font script="Khmr" typeface="MoolBoran"/>
-        <a:font script="Knda" typeface="Tunga"/>
-        <a:font script="Guru" typeface="Raavi"/>
-        <a:font script="Cans" typeface="Euphemia"/>
-        <a:font script="Cher" typeface="Plantagenet Cherokee"/>
-        <a:font script="Yiii" typeface="Microsoft Yi Baiti"/>
-        <a:font script="Tibt" typeface="Microsoft Himalaya"/>
-        <a:font script="Thaa" typeface="MV Boli"/>
-        <a:font script="Deva" typeface="Mangal"/>
-        <a:font script="Telu" typeface="Gautami"/>
-        <a:font script="Taml" typeface="Latha"/>
-        <a:font script="Syrc" typeface="Estrangelo Edessa"/>
-        <a:font script="Orya" typeface="Kalinga"/>
-        <a:font script="Mlym" typeface="Kartika"/>
-        <a:font script="Laoo" typeface="DokChampa"/>
-        <a:font script="Sinh" typeface="Iskoola Pota"/>
-        <a:font script="Mong" typeface="Mongolian Baiti"/>
-        <a:font script="Viet" typeface="Times New Roman"/>
-        <a:font script="Uigh" typeface="Microsoft Uighur"/>
-        <a:font script="Geor" typeface="Sylfaen"/>
-      </a:majorFont>
-      <a:minorFont>
-        <a:latin typeface="Arial"/>
-        <a:ea typeface=""/>
-        <a:cs typeface=""/>
-        <a:font script="Jpan" typeface="ＭＳ Ｐゴシック"/>
-        <a:font script="Hang" typeface="맑은 고딕"/>
-        <a:font script="Hans" typeface="宋体"/>
-        <a:font script="Hant" typeface="新細明體"/>
-        <a:font script="Arab" typeface="Arial"/>
-        <a:font script="Hebr" typeface="Arial"/>
-        <a:font script="Thai" typeface="Cordia New"/>
-        <a:font script="Ethi" typeface="Nyala"/>
-        <a:font script="Beng" typeface="Vrinda"/>
-        <a:font script="Gujr" typeface="Shruti"/>
-        <a:font script="Khmr" typeface="DaunPenh"/>
-        <a:font script="Knda" typeface="Tunga"/>
-        <a:font script="Guru" typeface="Raavi"/>
-        <a:font script="Cans" typeface="Euphemia"/>
-        <a:font script="Cher" typeface="Plantagenet Cherokee"/>
-        <a:font script="Yiii" typeface="Microsoft Yi Baiti"/>
-        <a:font script="Tibt" typeface="Microsoft Himalaya"/>
-        <a:font script="Thaa" typeface="MV Boli"/>
-        <a:font script="Deva" typeface="Mangal"/>
-        <a:font script="Telu" typeface="Gautami"/>
-        <a:font script="Taml" typeface="Latha"/>
-        <a:font script="Syrc" typeface="Estrangelo Edessa"/>
-        <a:font script="Orya" typeface="Kalinga"/>
-        <a:font script="Mlym" typeface="Kartika"/>
-        <a:font script="Laoo" typeface="DokChampa"/>
-        <a:font script="Sinh" typeface="Iskoola Pota"/>
-        <a:font script="Mong" typeface="Mongolian Baiti"/>
-        <a:font script="Viet" typeface="Arial"/>
-        <a:font script="Uigh" typeface="Microsoft Uighur"/>
-        <a:font script="Geor" typeface="Sylfaen"/>
-      </a:minorFont>
-    </a:fontScheme>
-    <a:fmtScheme name="Office">
-      <a:fillStyleLst>
-        <a:solidFill>
-          <a:schemeClr val="phClr"/>
-        </a:solidFill>
-        <a:gradFill rotWithShape="1">
-          <a:gsLst>
-            <a:gs pos="0">
-              <a:schemeClr val="phClr">
-                <a:tint val="50000"/>
-                <a:satMod val="300000"/>
-              </a:schemeClr>
-            </a:gs>
-            <a:gs pos="35000">
-              <a:schemeClr val="phClr">
-                <a:tint val="37000"/>
-                <a:satMod val="300000"/>
-              </a:schemeClr>
-            </a:gs>
-            <a:gs pos="100000">
-              <a:schemeClr val="phClr">
-                <a:tint val="15000"/>
-                <a:satMod val="350000"/>
-              </a:schemeClr>
-            </a:gs>
-          </a:gsLst>
-          <a:lin ang="16200000" scaled="1"/>
-        </a:gradFill>
-        <a:gradFill rotWithShape="1">
-          <a:gsLst>
-            <a:gs pos="0">
-              <a:schemeClr val="phClr">
-                <a:tint val="100000"/>
-                <a:shade val="100000"/>
-                <a:satMod val="130000"/>
-              </a:schemeClr>
-            </a:gs>
-            <a:gs pos="100000">
-              <a:schemeClr val="phClr">
-                <a:tint val="50000"/>
-                <a:shade val="100000"/>
-                <a:satMod val="350000"/>
-              </a:schemeClr>
-            </a:gs>
-          </a:gsLst>
-          <a:lin ang="16200000" scaled="0"/>
-        </a:gradFill>
-      </a:fillStyleLst>
-      <a:lnStyleLst>
-        <a:ln w="9525" cap="flat" cmpd="sng" algn="ctr">
-          <a:solidFill>
-            <a:schemeClr val="phClr">
-              <a:shade val="95000"/>
-              <a:satMod val="105000"/>
-            </a:schemeClr>
-          </a:solidFill>
-          <a:prstDash val="solid"/>
-        </a:ln>
-        <a:ln w="25400" cap="flat" cmpd="sng" algn="ctr">
-          <a:solidFill>
-            <a:schemeClr val="phClr"/>
-          </a:solidFill>
-          <a:prstDash val="solid"/>
-        </a:ln>
-        <a:ln w="38100" cap="flat" cmpd="sng" algn="ctr">
-          <a:solidFill>
-            <a:schemeClr val="phClr"/>
-          </a:solidFill>
-          <a:prstDash val="solid"/>
-        </a:ln>
-      </a:lnStyleLst>
-      <a:effectStyleLst>
-        <a:effectStyle>
-          <a:effectLst>
-            <a:outerShdw blurRad="40000" dist="20000" dir="5400000" rotWithShape="0">
-              <a:srgbClr val="000000">
-                <a:alpha val="38000"/>
-              </a:srgbClr>
-            </a:outerShdw>
-          </a:effectLst>
-        </a:effectStyle>
-        <a:effectStyle>
-          <a:effectLst>
-            <a:outerShdw blurRad="40000" dist="23000" dir="5400000" rotWithShape="0">
-              <a:srgbClr val="000000">
-                <a:alpha val="35000"/>
-              </a:srgbClr>
-            </a:outerShdw>
-          </a:effectLst>
-        </a:effectStyle>
-        <a:effectStyle>
-          <a:effectLst>
-            <a:outerShdw blurRad="40000" dist="23000" dir="5400000" rotWithShape="0">
-              <a:srgbClr val="000000">
-                <a:alpha val="35000"/>
-              </a:srgbClr>
-            </a:outerShdw>
-          </a:effectLst>
-          <a:scene3d>
-            <a:camera prst="orthographicFront">
-              <a:rot lat="0" lon="0" rev="0"/>
-            </a:camera>
-            <a:lightRig rig="threePt" dir="t">
-              <a:rot lat="0" lon="0" rev="1200000"/>
-            </a:lightRig>
-          </a:scene3d>
-          <a:sp3d>
-            <a:bevelT w="63500" h="25400"/>
-          </a:sp3d>
-        </a:effectStyle>
-      </a:effectStyleLst>
-      <a:bgFillStyleLst>
-        <a:solidFill>
-          <a:schemeClr val="phClr"/>
-        </a:solidFill>
-        <a:gradFill rotWithShape="1">
-          <a:gsLst>
-            <a:gs pos="0">
-              <a:schemeClr val="phClr">
-                <a:tint val="40000"/>
-                <a:satMod val="350000"/>
-              </a:schemeClr>
-            </a:gs>
-            <a:gs pos="40000">
-              <a:schemeClr val="phClr">
-                <a:tint val="45000"/>
-                <a:shade val="99000"/>
-                <a:satMod val="350000"/>
-              </a:schemeClr>
-            </a:gs>
-            <a:gs pos="100000">
-              <a:schemeClr val="phClr">
-                <a:shade val="20000"/>
-                <a:satMod val="255000"/>
-              </a:schemeClr>
-            </a:gs>
-          </a:gsLst>
-          <a:path path="circle">
-            <a:fillToRect l="50000" t="-80000" r="50000" b="180000"/>
-          </a:path>
-        </a:gradFill>
-        <a:gradFill rotWithShape="1">
-          <a:gsLst>
-            <a:gs pos="0">
-              <a:schemeClr val="phClr">
-                <a:tint val="80000"/>
-                <a:satMod val="300000"/>
-              </a:schemeClr>
-            </a:gs>
-            <a:gs pos="100000">
-              <a:schemeClr val="phClr">
-                <a:shade val="30000"/>
-                <a:satMod val="200000"/>
-              </a:schemeClr>
-            </a:gs>
-          </a:gsLst>
-          <a:path path="circle">
-            <a:fillToRect l="50000" t="50000" r="50000" b="50000"/>
-          </a:path>
-        </a:gradFill>
-      </a:bgFillStyleLst>
-    </a:fmtScheme>
-  </a:themeElements>
-</a:theme>
 </file>